--- a/library/seminars/sem-06/rendered/sem-06-en.pptx
+++ b/library/seminars/sem-06/rendered/sem-06-en.pptx
@@ -7998,7 +7998,7 @@
               <a:t>Case three: two lectures in one copy.</a:t>
             </a:r>
             <a:r>
-              <a:t> A lecture was being built in parallel with another in one working copy, and the branch was switched from both sessions. Each session saw its own branch in place — at the moment it looked. The switches in one session came to more than seven, and about two hours went on recovering.</a:t>
+              <a:t> A lecture was being built in parallel with another in one working copy, and the branch was switched from both sessions. Each session saw its own branch in place — at the moment it was looking. The switches in one session came to more than seven, and about two hours went on recovering.</a:t>
             </a:r>
           </a:p>
           <a:p/>
@@ -12669,7 +12669,7 @@
       </p:sp>
       <p:pic>
         <p:nvPicPr>
-          <p:cNvPr id="5" name="Picture 4" descr="ramka-n01-hero-sem06.png"/>
+          <p:cNvPr id="5" name="Picture 4" descr="ramka-n01-hero-sem06-en.png"/>
           <p:cNvPicPr>
             <a:picLocks noChangeAspect="1"/>
           </p:cNvPicPr>
@@ -14444,7 +14444,7 @@
         <p:spPr>
           <a:xfrm>
             <a:off x="658368" y="1098804"/>
-            <a:ext cx="885157" cy="252095"/>
+            <a:ext cx="881218" cy="252095"/>
           </a:xfrm>
           <a:prstGeom prst="rect">
             <a:avLst/>
@@ -14485,8 +14485,8 @@
         </p:nvSpPr>
         <p:spPr>
           <a:xfrm>
-            <a:off x="1689829" y="1098804"/>
-            <a:ext cx="3665696" cy="252095"/>
+            <a:off x="1685890" y="1098804"/>
+            <a:ext cx="3662449" cy="252095"/>
           </a:xfrm>
           <a:prstGeom prst="rect">
             <a:avLst/>
@@ -14527,8 +14527,8 @@
         </p:nvSpPr>
         <p:spPr>
           <a:xfrm>
-            <a:off x="5501829" y="1098804"/>
-            <a:ext cx="5882450" cy="252095"/>
+            <a:off x="5494644" y="1098804"/>
+            <a:ext cx="5889635" cy="252095"/>
           </a:xfrm>
           <a:prstGeom prst="rect">
             <a:avLst/>
@@ -14570,7 +14570,7 @@
         <p:spPr>
           <a:xfrm>
             <a:off x="658368" y="1350899"/>
-            <a:ext cx="885157" cy="522541"/>
+            <a:ext cx="881218" cy="522541"/>
           </a:xfrm>
           <a:prstGeom prst="rect">
             <a:avLst/>
@@ -14611,8 +14611,8 @@
         </p:nvSpPr>
         <p:spPr>
           <a:xfrm>
-            <a:off x="1689829" y="1350899"/>
-            <a:ext cx="3665696" cy="522541"/>
+            <a:off x="1685890" y="1350899"/>
+            <a:ext cx="3662449" cy="522541"/>
           </a:xfrm>
           <a:prstGeom prst="rect">
             <a:avLst/>
@@ -14653,8 +14653,8 @@
         </p:nvSpPr>
         <p:spPr>
           <a:xfrm>
-            <a:off x="5501829" y="1350899"/>
-            <a:ext cx="5882450" cy="522541"/>
+            <a:off x="5494644" y="1350899"/>
+            <a:ext cx="5889635" cy="522541"/>
           </a:xfrm>
           <a:prstGeom prst="rect">
             <a:avLst/>
@@ -14731,7 +14731,7 @@
         <p:spPr>
           <a:xfrm>
             <a:off x="658368" y="1873440"/>
-            <a:ext cx="885157" cy="654050"/>
+            <a:ext cx="881218" cy="654050"/>
           </a:xfrm>
           <a:prstGeom prst="rect">
             <a:avLst/>
@@ -14772,8 +14772,8 @@
         </p:nvSpPr>
         <p:spPr>
           <a:xfrm>
-            <a:off x="1689829" y="1873440"/>
-            <a:ext cx="3665696" cy="654050"/>
+            <a:off x="1685890" y="1873440"/>
+            <a:ext cx="3662449" cy="654050"/>
           </a:xfrm>
           <a:prstGeom prst="rect">
             <a:avLst/>
@@ -14814,8 +14814,8 @@
         </p:nvSpPr>
         <p:spPr>
           <a:xfrm>
-            <a:off x="5501829" y="1873440"/>
-            <a:ext cx="5882450" cy="654050"/>
+            <a:off x="5494644" y="1873440"/>
+            <a:ext cx="5889635" cy="654050"/>
           </a:xfrm>
           <a:prstGeom prst="rect">
             <a:avLst/>
@@ -14892,7 +14892,7 @@
         <p:spPr>
           <a:xfrm>
             <a:off x="658368" y="2527490"/>
-            <a:ext cx="885157" cy="654050"/>
+            <a:ext cx="881218" cy="654050"/>
           </a:xfrm>
           <a:prstGeom prst="rect">
             <a:avLst/>
@@ -14933,8 +14933,8 @@
         </p:nvSpPr>
         <p:spPr>
           <a:xfrm>
-            <a:off x="1689829" y="2527490"/>
-            <a:ext cx="3665696" cy="654050"/>
+            <a:off x="1685890" y="2527490"/>
+            <a:ext cx="3662449" cy="654050"/>
           </a:xfrm>
           <a:prstGeom prst="rect">
             <a:avLst/>
@@ -14975,8 +14975,8 @@
         </p:nvSpPr>
         <p:spPr>
           <a:xfrm>
-            <a:off x="5501829" y="2527490"/>
-            <a:ext cx="5882450" cy="654050"/>
+            <a:off x="5494644" y="2527490"/>
+            <a:ext cx="5889635" cy="654050"/>
           </a:xfrm>
           <a:prstGeom prst="rect">
             <a:avLst/>
@@ -15053,7 +15053,7 @@
         <p:spPr>
           <a:xfrm>
             <a:off x="658368" y="3181540"/>
-            <a:ext cx="885157" cy="522541"/>
+            <a:ext cx="881218" cy="522541"/>
           </a:xfrm>
           <a:prstGeom prst="rect">
             <a:avLst/>
@@ -15094,8 +15094,8 @@
         </p:nvSpPr>
         <p:spPr>
           <a:xfrm>
-            <a:off x="1689829" y="3181540"/>
-            <a:ext cx="3665696" cy="522541"/>
+            <a:off x="1685890" y="3181540"/>
+            <a:ext cx="3662449" cy="522541"/>
           </a:xfrm>
           <a:prstGeom prst="rect">
             <a:avLst/>
@@ -15136,8 +15136,8 @@
         </p:nvSpPr>
         <p:spPr>
           <a:xfrm>
-            <a:off x="5501829" y="3181540"/>
-            <a:ext cx="5882450" cy="522541"/>
+            <a:off x="5494644" y="3181540"/>
+            <a:ext cx="5889635" cy="522541"/>
           </a:xfrm>
           <a:prstGeom prst="rect">
             <a:avLst/>
@@ -15214,7 +15214,7 @@
         <p:spPr>
           <a:xfrm>
             <a:off x="658368" y="3704082"/>
-            <a:ext cx="885157" cy="522541"/>
+            <a:ext cx="881218" cy="522541"/>
           </a:xfrm>
           <a:prstGeom prst="rect">
             <a:avLst/>
@@ -15273,8 +15273,8 @@
         </p:nvSpPr>
         <p:spPr>
           <a:xfrm>
-            <a:off x="1689829" y="3704082"/>
-            <a:ext cx="3665696" cy="522541"/>
+            <a:off x="1685890" y="3704082"/>
+            <a:ext cx="3662449" cy="522541"/>
           </a:xfrm>
           <a:prstGeom prst="rect">
             <a:avLst/>
@@ -15315,8 +15315,8 @@
         </p:nvSpPr>
         <p:spPr>
           <a:xfrm>
-            <a:off x="5501829" y="3704082"/>
-            <a:ext cx="5882450" cy="522541"/>
+            <a:off x="5494644" y="3704082"/>
+            <a:ext cx="5889635" cy="522541"/>
           </a:xfrm>
           <a:prstGeom prst="rect">
             <a:avLst/>
@@ -16853,7 +16853,7 @@
       </p:sp>
       <p:pic>
         <p:nvPicPr>
-          <p:cNvPr id="3" name="Picture 2" descr="mcp-n14-oblasti.png"/>
+          <p:cNvPr id="3" name="Picture 2" descr="mcp-n14-oblasti-en.png"/>
           <p:cNvPicPr>
             <a:picLocks noChangeAspect="1"/>
           </p:cNvPicPr>
@@ -16994,7 +16994,7 @@
         <p:spPr>
           <a:xfrm>
             <a:off x="502920" y="1319784"/>
-            <a:ext cx="82296" cy="715263"/>
+            <a:ext cx="82296" cy="683768"/>
           </a:xfrm>
           <a:prstGeom prst="roundRect">
             <a:avLst>
@@ -17040,7 +17040,7 @@
         <p:spPr>
           <a:xfrm>
             <a:off x="859536" y="1447800"/>
-            <a:ext cx="10643616" cy="459231"/>
+            <a:ext cx="10643616" cy="427736"/>
           </a:xfrm>
           <a:prstGeom prst="rect">
             <a:avLst/>
@@ -17055,14 +17055,14 @@
           <a:p>
             <a:pPr algn="l">
               <a:lnSpc>
-                <a:spcPts val="1736"/>
+                <a:spcPts val="1612"/>
               </a:lnSpc>
               <a:spcAft>
                 <a:spcPts val="300"/>
               </a:spcAft>
             </a:pPr>
             <a:r>
-              <a:rPr sz="1400" b="1" i="0">
+              <a:rPr sz="1300" b="1" i="0">
                 <a:solidFill>
                   <a:srgbClr val="141B2E"/>
                 </a:solidFill>
@@ -17081,12 +17081,12 @@
         </p:nvSpPr>
         <p:spPr>
           <a:xfrm>
-            <a:off x="502920" y="2199640"/>
-            <a:ext cx="11183112" cy="2985769"/>
+            <a:off x="502920" y="2168144"/>
+            <a:ext cx="11183112" cy="2905252"/>
           </a:xfrm>
           <a:prstGeom prst="roundRect">
             <a:avLst>
-              <a:gd name="adj" fmla="val 10208"/>
+              <a:gd name="adj" fmla="val 10491"/>
             </a:avLst>
           </a:prstGeom>
           <a:solidFill>
@@ -17129,8 +17129,8 @@
         </p:nvSpPr>
         <p:spPr>
           <a:xfrm>
-            <a:off x="685800" y="2382520"/>
-            <a:ext cx="3090232" cy="282067"/>
+            <a:off x="685800" y="2351024"/>
+            <a:ext cx="3108580" cy="274574"/>
           </a:xfrm>
           <a:prstGeom prst="rect">
             <a:avLst/>
@@ -17145,14 +17145,14 @@
           <a:p>
             <a:pPr algn="l">
               <a:lnSpc>
-                <a:spcPts val="1265"/>
+                <a:spcPts val="1210"/>
               </a:lnSpc>
               <a:spcAft>
                 <a:spcPts val="0"/>
               </a:spcAft>
             </a:pPr>
             <a:r>
-              <a:rPr sz="1150" b="1" i="0">
+              <a:rPr sz="1100" b="1" i="0">
                 <a:solidFill>
                   <a:srgbClr val="6B7685"/>
                 </a:solidFill>
@@ -17171,8 +17171,8 @@
         </p:nvSpPr>
         <p:spPr>
           <a:xfrm>
-            <a:off x="3922336" y="2382520"/>
-            <a:ext cx="7434511" cy="282067"/>
+            <a:off x="3940684" y="2351024"/>
+            <a:ext cx="7416163" cy="274574"/>
           </a:xfrm>
           <a:prstGeom prst="rect">
             <a:avLst/>
@@ -17187,14 +17187,14 @@
           <a:p>
             <a:pPr algn="l">
               <a:lnSpc>
-                <a:spcPts val="1265"/>
+                <a:spcPts val="1210"/>
               </a:lnSpc>
               <a:spcAft>
                 <a:spcPts val="0"/>
               </a:spcAft>
             </a:pPr>
             <a:r>
-              <a:rPr sz="1150" b="1" i="0">
+              <a:rPr sz="1100" b="1" i="0">
                 <a:solidFill>
                   <a:srgbClr val="6B7685"/>
                 </a:solidFill>
@@ -17213,8 +17213,8 @@
         </p:nvSpPr>
         <p:spPr>
           <a:xfrm>
-            <a:off x="685800" y="2664587"/>
-            <a:ext cx="3090232" cy="668464"/>
+            <a:off x="685800" y="2625598"/>
+            <a:ext cx="3108580" cy="646557"/>
           </a:xfrm>
           <a:prstGeom prst="rect">
             <a:avLst/>
@@ -17229,14 +17229,14 @@
           <a:p>
             <a:pPr algn="l">
               <a:lnSpc>
-                <a:spcPts val="1322"/>
+                <a:spcPts val="1264"/>
               </a:lnSpc>
               <a:spcAft>
                 <a:spcPts val="0"/>
               </a:spcAft>
             </a:pPr>
             <a:r>
-              <a:rPr sz="1150" b="0" i="0">
+              <a:rPr sz="1100" b="0" i="0">
                 <a:solidFill>
                   <a:srgbClr val="141B2E"/>
                 </a:solidFill>
@@ -17255,8 +17255,8 @@
         </p:nvSpPr>
         <p:spPr>
           <a:xfrm>
-            <a:off x="3922336" y="2664587"/>
-            <a:ext cx="7434511" cy="668464"/>
+            <a:off x="3940684" y="2625598"/>
+            <a:ext cx="7416163" cy="646557"/>
           </a:xfrm>
           <a:prstGeom prst="rect">
             <a:avLst/>
@@ -17271,14 +17271,14 @@
           <a:p>
             <a:pPr algn="l">
               <a:lnSpc>
-                <a:spcPts val="1322"/>
+                <a:spcPts val="1264"/>
               </a:lnSpc>
               <a:spcAft>
                 <a:spcPts val="0"/>
               </a:spcAft>
             </a:pPr>
             <a:r>
-              <a:rPr sz="1150" b="0" i="0">
+              <a:rPr sz="1100" b="0" i="0">
                 <a:solidFill>
                   <a:srgbClr val="141B2E"/>
                 </a:solidFill>
@@ -17297,7 +17297,7 @@
         </p:nvCxnSpPr>
         <p:spPr>
           <a:xfrm>
-            <a:off x="685800" y="3333051"/>
+            <a:off x="685800" y="3272155"/>
             <a:ext cx="10817352" cy="0"/>
           </a:xfrm>
           <a:prstGeom prst="line">
@@ -17332,8 +17332,8 @@
         </p:nvSpPr>
         <p:spPr>
           <a:xfrm>
-            <a:off x="685800" y="3333051"/>
-            <a:ext cx="3090232" cy="500506"/>
+            <a:off x="685800" y="3272155"/>
+            <a:ext cx="3108580" cy="485902"/>
           </a:xfrm>
           <a:prstGeom prst="rect">
             <a:avLst/>
@@ -17348,14 +17348,14 @@
           <a:p>
             <a:pPr algn="l">
               <a:lnSpc>
-                <a:spcPts val="1322"/>
+                <a:spcPts val="1264"/>
               </a:lnSpc>
               <a:spcAft>
                 <a:spcPts val="0"/>
               </a:spcAft>
             </a:pPr>
             <a:r>
-              <a:rPr sz="1150" b="0" i="0">
+              <a:rPr sz="1100" b="0" i="0">
                 <a:solidFill>
                   <a:srgbClr val="141B2E"/>
                 </a:solidFill>
@@ -17374,8 +17374,8 @@
         </p:nvSpPr>
         <p:spPr>
           <a:xfrm>
-            <a:off x="3922336" y="3333051"/>
-            <a:ext cx="7434511" cy="500506"/>
+            <a:off x="3940684" y="3272155"/>
+            <a:ext cx="7416163" cy="485902"/>
           </a:xfrm>
           <a:prstGeom prst="rect">
             <a:avLst/>
@@ -17390,14 +17390,14 @@
           <a:p>
             <a:pPr algn="l">
               <a:lnSpc>
-                <a:spcPts val="1322"/>
+                <a:spcPts val="1264"/>
               </a:lnSpc>
               <a:spcAft>
                 <a:spcPts val="0"/>
               </a:spcAft>
             </a:pPr>
             <a:r>
-              <a:rPr sz="1150" b="0" i="0">
+              <a:rPr sz="1100" b="0" i="0">
                 <a:solidFill>
                   <a:srgbClr val="141B2E"/>
                 </a:solidFill>
@@ -17416,7 +17416,7 @@
         </p:nvCxnSpPr>
         <p:spPr>
           <a:xfrm>
-            <a:off x="685800" y="3833558"/>
+            <a:off x="685800" y="3758057"/>
             <a:ext cx="10817352" cy="0"/>
           </a:xfrm>
           <a:prstGeom prst="line">
@@ -17451,8 +17451,8 @@
         </p:nvSpPr>
         <p:spPr>
           <a:xfrm>
-            <a:off x="685800" y="3833558"/>
-            <a:ext cx="3090232" cy="668464"/>
+            <a:off x="685800" y="3758057"/>
+            <a:ext cx="3108580" cy="646557"/>
           </a:xfrm>
           <a:prstGeom prst="rect">
             <a:avLst/>
@@ -17467,14 +17467,14 @@
           <a:p>
             <a:pPr algn="l">
               <a:lnSpc>
-                <a:spcPts val="1322"/>
+                <a:spcPts val="1264"/>
               </a:lnSpc>
               <a:spcAft>
                 <a:spcPts val="0"/>
               </a:spcAft>
             </a:pPr>
             <a:r>
-              <a:rPr sz="1150" b="0" i="0">
+              <a:rPr sz="1100" b="0" i="0">
                 <a:solidFill>
                   <a:srgbClr val="141B2E"/>
                 </a:solidFill>
@@ -17493,8 +17493,8 @@
         </p:nvSpPr>
         <p:spPr>
           <a:xfrm>
-            <a:off x="3922336" y="3833558"/>
-            <a:ext cx="7434511" cy="668464"/>
+            <a:off x="3940684" y="3758057"/>
+            <a:ext cx="7416163" cy="646557"/>
           </a:xfrm>
           <a:prstGeom prst="rect">
             <a:avLst/>
@@ -17509,14 +17509,14 @@
           <a:p>
             <a:pPr algn="l">
               <a:lnSpc>
-                <a:spcPts val="1322"/>
+                <a:spcPts val="1264"/>
               </a:lnSpc>
               <a:spcAft>
                 <a:spcPts val="0"/>
               </a:spcAft>
             </a:pPr>
             <a:r>
-              <a:rPr sz="1150" b="0" i="0">
+              <a:rPr sz="1100" b="0" i="0">
                 <a:solidFill>
                   <a:srgbClr val="141B2E"/>
                 </a:solidFill>
@@ -17535,7 +17535,7 @@
         </p:nvCxnSpPr>
         <p:spPr>
           <a:xfrm>
-            <a:off x="685800" y="4502022"/>
+            <a:off x="685800" y="4404614"/>
             <a:ext cx="10817352" cy="0"/>
           </a:xfrm>
           <a:prstGeom prst="line">
@@ -17570,8 +17570,8 @@
         </p:nvSpPr>
         <p:spPr>
           <a:xfrm>
-            <a:off x="685800" y="4502022"/>
-            <a:ext cx="3090232" cy="500506"/>
+            <a:off x="685800" y="4404614"/>
+            <a:ext cx="3108580" cy="485902"/>
           </a:xfrm>
           <a:prstGeom prst="rect">
             <a:avLst/>
@@ -17586,14 +17586,14 @@
           <a:p>
             <a:pPr algn="l">
               <a:lnSpc>
-                <a:spcPts val="1322"/>
+                <a:spcPts val="1264"/>
               </a:lnSpc>
               <a:spcAft>
                 <a:spcPts val="0"/>
               </a:spcAft>
             </a:pPr>
             <a:r>
-              <a:rPr sz="1150" b="0" i="0">
+              <a:rPr sz="1100" b="0" i="0">
                 <a:solidFill>
                   <a:srgbClr val="141B2E"/>
                 </a:solidFill>
@@ -17612,8 +17612,8 @@
         </p:nvSpPr>
         <p:spPr>
           <a:xfrm>
-            <a:off x="3922336" y="4502022"/>
-            <a:ext cx="7434511" cy="500506"/>
+            <a:off x="3940684" y="4404614"/>
+            <a:ext cx="7416163" cy="485902"/>
           </a:xfrm>
           <a:prstGeom prst="rect">
             <a:avLst/>
@@ -17628,14 +17628,14 @@
           <a:p>
             <a:pPr algn="l">
               <a:lnSpc>
-                <a:spcPts val="1322"/>
+                <a:spcPts val="1264"/>
               </a:lnSpc>
               <a:spcAft>
                 <a:spcPts val="0"/>
               </a:spcAft>
             </a:pPr>
             <a:r>
-              <a:rPr sz="1150" b="0" i="0">
+              <a:rPr sz="1100" b="0" i="0">
                 <a:solidFill>
                   <a:srgbClr val="141B2E"/>
                 </a:solidFill>
@@ -17654,7 +17654,7 @@
         </p:nvSpPr>
         <p:spPr>
           <a:xfrm>
-            <a:off x="502920" y="5350002"/>
+            <a:off x="502920" y="5237988"/>
             <a:ext cx="82296" cy="715263"/>
           </a:xfrm>
           <a:prstGeom prst="roundRect">
@@ -17700,7 +17700,7 @@
         </p:nvSpPr>
         <p:spPr>
           <a:xfrm>
-            <a:off x="859536" y="5478017"/>
+            <a:off x="859536" y="5366004"/>
             <a:ext cx="10643616" cy="459231"/>
           </a:xfrm>
           <a:prstGeom prst="rect">
@@ -18543,7 +18543,7 @@
       </p:sp>
       <p:pic>
         <p:nvPicPr>
-          <p:cNvPr id="13" name="Picture 12" descr="mcp-n16-prioritet.png"/>
+          <p:cNvPr id="13" name="Picture 12" descr="mcp-n16-prioritet-en.png"/>
           <p:cNvPicPr>
             <a:picLocks noChangeAspect="1"/>
           </p:cNvPicPr>
@@ -19203,7 +19203,7 @@
       </p:sp>
       <p:pic>
         <p:nvPicPr>
-          <p:cNvPr id="3" name="Picture 2" descr="mcp-n18-dolya-konteksta.png"/>
+          <p:cNvPr id="3" name="Picture 2" descr="mcp-n18-dolya-konteksta-en.png"/>
           <p:cNvPicPr>
             <a:picLocks noChangeAspect="1"/>
           </p:cNvPicPr>
@@ -19937,7 +19937,7 @@
         <p:spPr>
           <a:xfrm>
             <a:off x="2207934" y="3404108"/>
-            <a:ext cx="4999852" cy="282067"/>
+            <a:ext cx="4986053" cy="282067"/>
           </a:xfrm>
           <a:prstGeom prst="rect">
             <a:avLst/>
@@ -19978,8 +19978,8 @@
         </p:nvSpPr>
         <p:spPr>
           <a:xfrm>
-            <a:off x="7354091" y="3404108"/>
-            <a:ext cx="4002756" cy="282067"/>
+            <a:off x="7340292" y="3404108"/>
+            <a:ext cx="4016555" cy="282067"/>
           </a:xfrm>
           <a:prstGeom prst="rect">
             <a:avLst/>
@@ -20063,7 +20063,7 @@
         <p:spPr>
           <a:xfrm>
             <a:off x="2207934" y="3686175"/>
-            <a:ext cx="4999852" cy="1340294"/>
+            <a:ext cx="4986053" cy="1340294"/>
           </a:xfrm>
           <a:prstGeom prst="rect">
             <a:avLst/>
@@ -20104,8 +20104,8 @@
         </p:nvSpPr>
         <p:spPr>
           <a:xfrm>
-            <a:off x="7354091" y="3686175"/>
-            <a:ext cx="4002756" cy="1340294"/>
+            <a:off x="7340292" y="3686175"/>
+            <a:ext cx="4016555" cy="1340294"/>
           </a:xfrm>
           <a:prstGeom prst="rect">
             <a:avLst/>
@@ -20224,7 +20224,7 @@
         <p:spPr>
           <a:xfrm>
             <a:off x="2207934" y="5026469"/>
-            <a:ext cx="4999852" cy="1004379"/>
+            <a:ext cx="4986053" cy="1004379"/>
           </a:xfrm>
           <a:prstGeom prst="rect">
             <a:avLst/>
@@ -20265,8 +20265,8 @@
         </p:nvSpPr>
         <p:spPr>
           <a:xfrm>
-            <a:off x="7354091" y="5026469"/>
-            <a:ext cx="4002756" cy="1004379"/>
+            <a:off x="7340292" y="5026469"/>
+            <a:ext cx="4016555" cy="1004379"/>
           </a:xfrm>
           <a:prstGeom prst="rect">
             <a:avLst/>
@@ -24440,7 +24440,7 @@
         <p:spPr>
           <a:xfrm>
             <a:off x="685800" y="1126236"/>
-            <a:ext cx="1199297" cy="282067"/>
+            <a:ext cx="1199042" cy="282067"/>
           </a:xfrm>
           <a:prstGeom prst="rect">
             <a:avLst/>
@@ -24481,8 +24481,8 @@
         </p:nvSpPr>
         <p:spPr>
           <a:xfrm>
-            <a:off x="2031401" y="1126236"/>
-            <a:ext cx="3588817" cy="282067"/>
+            <a:off x="2031146" y="1126236"/>
+            <a:ext cx="3582618" cy="282067"/>
           </a:xfrm>
           <a:prstGeom prst="rect">
             <a:avLst/>
@@ -24523,8 +24523,8 @@
         </p:nvSpPr>
         <p:spPr>
           <a:xfrm>
-            <a:off x="5766523" y="1126236"/>
-            <a:ext cx="5590324" cy="282067"/>
+            <a:off x="5760069" y="1126236"/>
+            <a:ext cx="5596778" cy="282067"/>
           </a:xfrm>
           <a:prstGeom prst="rect">
             <a:avLst/>
@@ -24566,7 +24566,7 @@
         <p:spPr>
           <a:xfrm>
             <a:off x="685800" y="1408303"/>
-            <a:ext cx="1199297" cy="668464"/>
+            <a:ext cx="1199042" cy="668464"/>
           </a:xfrm>
           <a:prstGeom prst="rect">
             <a:avLst/>
@@ -24607,8 +24607,8 @@
         </p:nvSpPr>
         <p:spPr>
           <a:xfrm>
-            <a:off x="2031401" y="1408303"/>
-            <a:ext cx="3588817" cy="668464"/>
+            <a:off x="2031146" y="1408303"/>
+            <a:ext cx="3582618" cy="668464"/>
           </a:xfrm>
           <a:prstGeom prst="rect">
             <a:avLst/>
@@ -24649,8 +24649,8 @@
         </p:nvSpPr>
         <p:spPr>
           <a:xfrm>
-            <a:off x="5766523" y="1408303"/>
-            <a:ext cx="5590324" cy="668464"/>
+            <a:off x="5760069" y="1408303"/>
+            <a:ext cx="5596778" cy="668464"/>
           </a:xfrm>
           <a:prstGeom prst="rect">
             <a:avLst/>
@@ -24727,7 +24727,7 @@
         <p:spPr>
           <a:xfrm>
             <a:off x="685800" y="2076767"/>
-            <a:ext cx="1199297" cy="668464"/>
+            <a:ext cx="1199042" cy="668464"/>
           </a:xfrm>
           <a:prstGeom prst="rect">
             <a:avLst/>
@@ -24768,8 +24768,8 @@
         </p:nvSpPr>
         <p:spPr>
           <a:xfrm>
-            <a:off x="2031401" y="2076767"/>
-            <a:ext cx="3588817" cy="668464"/>
+            <a:off x="2031146" y="2076767"/>
+            <a:ext cx="3582618" cy="668464"/>
           </a:xfrm>
           <a:prstGeom prst="rect">
             <a:avLst/>
@@ -24810,8 +24810,8 @@
         </p:nvSpPr>
         <p:spPr>
           <a:xfrm>
-            <a:off x="5766523" y="2076767"/>
-            <a:ext cx="5590324" cy="668464"/>
+            <a:off x="5760069" y="2076767"/>
+            <a:ext cx="5596778" cy="668464"/>
           </a:xfrm>
           <a:prstGeom prst="rect">
             <a:avLst/>
@@ -24888,7 +24888,7 @@
         <p:spPr>
           <a:xfrm>
             <a:off x="685800" y="2745232"/>
-            <a:ext cx="1199297" cy="668464"/>
+            <a:ext cx="1199042" cy="668464"/>
           </a:xfrm>
           <a:prstGeom prst="rect">
             <a:avLst/>
@@ -24929,8 +24929,8 @@
         </p:nvSpPr>
         <p:spPr>
           <a:xfrm>
-            <a:off x="2031401" y="2745232"/>
-            <a:ext cx="3588817" cy="668464"/>
+            <a:off x="2031146" y="2745232"/>
+            <a:ext cx="3582618" cy="668464"/>
           </a:xfrm>
           <a:prstGeom prst="rect">
             <a:avLst/>
@@ -24971,8 +24971,8 @@
         </p:nvSpPr>
         <p:spPr>
           <a:xfrm>
-            <a:off x="5766523" y="2745232"/>
-            <a:ext cx="5590324" cy="668464"/>
+            <a:off x="5760069" y="2745232"/>
+            <a:ext cx="5596778" cy="668464"/>
           </a:xfrm>
           <a:prstGeom prst="rect">
             <a:avLst/>
@@ -25049,7 +25049,7 @@
         <p:spPr>
           <a:xfrm>
             <a:off x="685800" y="3413696"/>
-            <a:ext cx="1199297" cy="668464"/>
+            <a:ext cx="1199042" cy="668464"/>
           </a:xfrm>
           <a:prstGeom prst="rect">
             <a:avLst/>
@@ -25090,8 +25090,8 @@
         </p:nvSpPr>
         <p:spPr>
           <a:xfrm>
-            <a:off x="2031401" y="3413696"/>
-            <a:ext cx="3588817" cy="668464"/>
+            <a:off x="2031146" y="3413696"/>
+            <a:ext cx="3582618" cy="668464"/>
           </a:xfrm>
           <a:prstGeom prst="rect">
             <a:avLst/>
@@ -25132,8 +25132,8 @@
         </p:nvSpPr>
         <p:spPr>
           <a:xfrm>
-            <a:off x="5766523" y="3413696"/>
-            <a:ext cx="5590324" cy="668464"/>
+            <a:off x="5760069" y="3413696"/>
+            <a:ext cx="5596778" cy="668464"/>
           </a:xfrm>
           <a:prstGeom prst="rect">
             <a:avLst/>
@@ -25210,7 +25210,7 @@
         <p:spPr>
           <a:xfrm>
             <a:off x="685800" y="4082160"/>
-            <a:ext cx="1199297" cy="668464"/>
+            <a:ext cx="1199042" cy="668464"/>
           </a:xfrm>
           <a:prstGeom prst="rect">
             <a:avLst/>
@@ -25251,8 +25251,8 @@
         </p:nvSpPr>
         <p:spPr>
           <a:xfrm>
-            <a:off x="2031401" y="4082160"/>
-            <a:ext cx="3588817" cy="668464"/>
+            <a:off x="2031146" y="4082160"/>
+            <a:ext cx="3582618" cy="668464"/>
           </a:xfrm>
           <a:prstGeom prst="rect">
             <a:avLst/>
@@ -25293,8 +25293,8 @@
         </p:nvSpPr>
         <p:spPr>
           <a:xfrm>
-            <a:off x="5766523" y="4082160"/>
-            <a:ext cx="5590324" cy="668464"/>
+            <a:off x="5760069" y="4082160"/>
+            <a:ext cx="5596778" cy="668464"/>
           </a:xfrm>
           <a:prstGeom prst="rect">
             <a:avLst/>
@@ -25536,7 +25536,7 @@
       </p:sp>
       <p:pic>
         <p:nvPicPr>
-          <p:cNvPr id="3" name="Picture 2" descr="mcp-n25-chto-v-kontekste.png"/>
+          <p:cNvPr id="3" name="Picture 2" descr="mcp-n25-chto-v-kontekste-en.png"/>
           <p:cNvPicPr>
             <a:picLocks noChangeAspect="1"/>
           </p:cNvPicPr>
@@ -29690,7 +29690,7 @@
       </p:sp>
       <p:pic>
         <p:nvPicPr>
-          <p:cNvPr id="3" name="Picture 2" descr="subagent-n30-kontekst-i-subagenty.png"/>
+          <p:cNvPr id="3" name="Picture 2" descr="subagent-n30-kontekst-i-subagenty-en.png"/>
           <p:cNvPicPr>
             <a:picLocks noChangeAspect="1"/>
           </p:cNvPicPr>
@@ -29824,7 +29824,7 @@
       </p:sp>
       <p:pic>
         <p:nvPicPr>
-          <p:cNvPr id="3" name="Picture 2" descr="subagent-n31-subagent-tselikom.png"/>
+          <p:cNvPr id="3" name="Picture 2" descr="subagent-n31-subagent-tselikom-en.png"/>
           <p:cNvPicPr>
             <a:picLocks noChangeAspect="1"/>
           </p:cNvPicPr>
@@ -31505,7 +31505,7 @@
         <p:spPr>
           <a:xfrm>
             <a:off x="685800" y="1126236"/>
-            <a:ext cx="1052911" cy="282067"/>
+            <a:ext cx="1053149" cy="282067"/>
           </a:xfrm>
           <a:prstGeom prst="rect">
             <a:avLst/>
@@ -31546,8 +31546,8 @@
         </p:nvSpPr>
         <p:spPr>
           <a:xfrm>
-            <a:off x="1885015" y="1126236"/>
-            <a:ext cx="3439168" cy="282067"/>
+            <a:off x="1885253" y="1126236"/>
+            <a:ext cx="3433915" cy="282067"/>
           </a:xfrm>
           <a:prstGeom prst="rect">
             <a:avLst/>
@@ -31588,8 +31588,8 @@
         </p:nvSpPr>
         <p:spPr>
           <a:xfrm>
-            <a:off x="5470487" y="1126236"/>
-            <a:ext cx="5886360" cy="282067"/>
+            <a:off x="5465472" y="1126236"/>
+            <a:ext cx="5891375" cy="282067"/>
           </a:xfrm>
           <a:prstGeom prst="rect">
             <a:avLst/>
@@ -31631,7 +31631,7 @@
         <p:spPr>
           <a:xfrm>
             <a:off x="685800" y="1408303"/>
-            <a:ext cx="1052911" cy="865631"/>
+            <a:ext cx="1053149" cy="865631"/>
           </a:xfrm>
           <a:prstGeom prst="rect">
             <a:avLst/>
@@ -31672,8 +31672,8 @@
         </p:nvSpPr>
         <p:spPr>
           <a:xfrm>
-            <a:off x="1885015" y="1408303"/>
-            <a:ext cx="3439168" cy="865631"/>
+            <a:off x="1885253" y="1408303"/>
+            <a:ext cx="3433915" cy="865631"/>
           </a:xfrm>
           <a:prstGeom prst="rect">
             <a:avLst/>
@@ -31714,8 +31714,8 @@
         </p:nvSpPr>
         <p:spPr>
           <a:xfrm>
-            <a:off x="5470487" y="1408303"/>
-            <a:ext cx="5886360" cy="865631"/>
+            <a:off x="5465472" y="1408303"/>
+            <a:ext cx="5891375" cy="865631"/>
           </a:xfrm>
           <a:prstGeom prst="rect">
             <a:avLst/>
@@ -31792,7 +31792,7 @@
         <p:spPr>
           <a:xfrm>
             <a:off x="685800" y="2273935"/>
-            <a:ext cx="1052911" cy="690371"/>
+            <a:ext cx="1053149" cy="690371"/>
           </a:xfrm>
           <a:prstGeom prst="rect">
             <a:avLst/>
@@ -31833,8 +31833,8 @@
         </p:nvSpPr>
         <p:spPr>
           <a:xfrm>
-            <a:off x="1885015" y="2273935"/>
-            <a:ext cx="3439168" cy="690371"/>
+            <a:off x="1885253" y="2273935"/>
+            <a:ext cx="3433915" cy="690371"/>
           </a:xfrm>
           <a:prstGeom prst="rect">
             <a:avLst/>
@@ -31875,8 +31875,8 @@
         </p:nvSpPr>
         <p:spPr>
           <a:xfrm>
-            <a:off x="5470487" y="2273935"/>
-            <a:ext cx="5886360" cy="690371"/>
+            <a:off x="5465472" y="2273935"/>
+            <a:ext cx="5891375" cy="690371"/>
           </a:xfrm>
           <a:prstGeom prst="rect">
             <a:avLst/>
@@ -31953,7 +31953,7 @@
         <p:spPr>
           <a:xfrm>
             <a:off x="685800" y="2964307"/>
-            <a:ext cx="1052911" cy="515111"/>
+            <a:ext cx="1053149" cy="515111"/>
           </a:xfrm>
           <a:prstGeom prst="rect">
             <a:avLst/>
@@ -31994,8 +31994,8 @@
         </p:nvSpPr>
         <p:spPr>
           <a:xfrm>
-            <a:off x="1885015" y="2964307"/>
-            <a:ext cx="3439168" cy="515111"/>
+            <a:off x="1885253" y="2964307"/>
+            <a:ext cx="3433915" cy="515111"/>
           </a:xfrm>
           <a:prstGeom prst="rect">
             <a:avLst/>
@@ -32036,8 +32036,8 @@
         </p:nvSpPr>
         <p:spPr>
           <a:xfrm>
-            <a:off x="5470487" y="2964307"/>
-            <a:ext cx="5886360" cy="515111"/>
+            <a:off x="5465472" y="2964307"/>
+            <a:ext cx="5891375" cy="515111"/>
           </a:xfrm>
           <a:prstGeom prst="rect">
             <a:avLst/>
@@ -32114,7 +32114,7 @@
         <p:spPr>
           <a:xfrm>
             <a:off x="685800" y="3479419"/>
-            <a:ext cx="1052911" cy="690371"/>
+            <a:ext cx="1053149" cy="690371"/>
           </a:xfrm>
           <a:prstGeom prst="rect">
             <a:avLst/>
@@ -32155,8 +32155,8 @@
         </p:nvSpPr>
         <p:spPr>
           <a:xfrm>
-            <a:off x="1885015" y="3479419"/>
-            <a:ext cx="3439168" cy="690371"/>
+            <a:off x="1885253" y="3479419"/>
+            <a:ext cx="3433915" cy="690371"/>
           </a:xfrm>
           <a:prstGeom prst="rect">
             <a:avLst/>
@@ -32197,8 +32197,8 @@
         </p:nvSpPr>
         <p:spPr>
           <a:xfrm>
-            <a:off x="5470487" y="3479419"/>
-            <a:ext cx="5886360" cy="690371"/>
+            <a:off x="5465472" y="3479419"/>
+            <a:ext cx="5891375" cy="690371"/>
           </a:xfrm>
           <a:prstGeom prst="rect">
             <a:avLst/>
@@ -32275,7 +32275,7 @@
         <p:spPr>
           <a:xfrm>
             <a:off x="685800" y="4169791"/>
-            <a:ext cx="1052911" cy="515111"/>
+            <a:ext cx="1053149" cy="515111"/>
           </a:xfrm>
           <a:prstGeom prst="rect">
             <a:avLst/>
@@ -32316,8 +32316,8 @@
         </p:nvSpPr>
         <p:spPr>
           <a:xfrm>
-            <a:off x="1885015" y="4169791"/>
-            <a:ext cx="3439168" cy="515111"/>
+            <a:off x="1885253" y="4169791"/>
+            <a:ext cx="3433915" cy="515111"/>
           </a:xfrm>
           <a:prstGeom prst="rect">
             <a:avLst/>
@@ -32358,8 +32358,8 @@
         </p:nvSpPr>
         <p:spPr>
           <a:xfrm>
-            <a:off x="5470487" y="4169791"/>
-            <a:ext cx="5886360" cy="515111"/>
+            <a:off x="5465472" y="4169791"/>
+            <a:ext cx="5891375" cy="515111"/>
           </a:xfrm>
           <a:prstGeom prst="rect">
             <a:avLst/>
@@ -32594,7 +32594,7 @@
                 </a:solidFill>
                 <a:latin typeface="Arial"/>
               </a:rPr>
-              <a:t>There is an example; a measurement over a sample, no</a:t>
+              <a:t>An example, yes; a measurement over a sample, no</a:t>
             </a:r>
           </a:p>
         </p:txBody>
@@ -36078,7 +36078,7 @@
         <p:spPr>
           <a:xfrm>
             <a:off x="685800" y="1927834"/>
-            <a:ext cx="6484004" cy="282067"/>
+            <a:ext cx="6501486" cy="282067"/>
           </a:xfrm>
           <a:prstGeom prst="rect">
             <a:avLst/>
@@ -36119,8 +36119,8 @@
         </p:nvSpPr>
         <p:spPr>
           <a:xfrm>
-            <a:off x="7316108" y="1927834"/>
-            <a:ext cx="4040739" cy="282067"/>
+            <a:off x="7333590" y="1927834"/>
+            <a:ext cx="4023257" cy="282067"/>
           </a:xfrm>
           <a:prstGeom prst="rect">
             <a:avLst/>
@@ -36162,7 +36162,7 @@
         <p:spPr>
           <a:xfrm>
             <a:off x="685800" y="2209901"/>
-            <a:ext cx="6484004" cy="529717"/>
+            <a:ext cx="6501486" cy="529717"/>
           </a:xfrm>
           <a:prstGeom prst="rect">
             <a:avLst/>
@@ -36203,8 +36203,8 @@
         </p:nvSpPr>
         <p:spPr>
           <a:xfrm>
-            <a:off x="7316108" y="2209901"/>
-            <a:ext cx="4040739" cy="529717"/>
+            <a:off x="7333590" y="2209901"/>
+            <a:ext cx="4023257" cy="529717"/>
           </a:xfrm>
           <a:prstGeom prst="rect">
             <a:avLst/>
@@ -36281,7 +36281,7 @@
         <p:spPr>
           <a:xfrm>
             <a:off x="685800" y="2739618"/>
-            <a:ext cx="6484004" cy="712279"/>
+            <a:ext cx="6501486" cy="712279"/>
           </a:xfrm>
           <a:prstGeom prst="rect">
             <a:avLst/>
@@ -36322,8 +36322,8 @@
         </p:nvSpPr>
         <p:spPr>
           <a:xfrm>
-            <a:off x="7316108" y="2739618"/>
-            <a:ext cx="4040739" cy="712279"/>
+            <a:off x="7333590" y="2739618"/>
+            <a:ext cx="4023257" cy="712279"/>
           </a:xfrm>
           <a:prstGeom prst="rect">
             <a:avLst/>
@@ -37353,7 +37353,7 @@
         <p:spPr>
           <a:xfrm>
             <a:off x="685800" y="1126236"/>
-            <a:ext cx="1718353" cy="282067"/>
+            <a:ext cx="1713111" cy="282067"/>
           </a:xfrm>
           <a:prstGeom prst="rect">
             <a:avLst/>
@@ -37394,8 +37394,8 @@
         </p:nvSpPr>
         <p:spPr>
           <a:xfrm>
-            <a:off x="2550457" y="1126236"/>
-            <a:ext cx="3357246" cy="282067"/>
+            <a:off x="2545215" y="1126236"/>
+            <a:ext cx="3354067" cy="282067"/>
           </a:xfrm>
           <a:prstGeom prst="rect">
             <a:avLst/>
@@ -37436,8 +37436,8 @@
         </p:nvSpPr>
         <p:spPr>
           <a:xfrm>
-            <a:off x="6054007" y="1126236"/>
-            <a:ext cx="5302840" cy="282067"/>
+            <a:off x="6045587" y="1126236"/>
+            <a:ext cx="5311260" cy="282067"/>
           </a:xfrm>
           <a:prstGeom prst="rect">
             <a:avLst/>
@@ -37479,7 +37479,7 @@
         <p:spPr>
           <a:xfrm>
             <a:off x="685800" y="1408303"/>
-            <a:ext cx="1718353" cy="515111"/>
+            <a:ext cx="1713111" cy="515111"/>
           </a:xfrm>
           <a:prstGeom prst="rect">
             <a:avLst/>
@@ -37520,8 +37520,8 @@
         </p:nvSpPr>
         <p:spPr>
           <a:xfrm>
-            <a:off x="2550457" y="1408303"/>
-            <a:ext cx="3357246" cy="515111"/>
+            <a:off x="2545215" y="1408303"/>
+            <a:ext cx="3354067" cy="515111"/>
           </a:xfrm>
           <a:prstGeom prst="rect">
             <a:avLst/>
@@ -37562,8 +37562,8 @@
         </p:nvSpPr>
         <p:spPr>
           <a:xfrm>
-            <a:off x="6054007" y="1408303"/>
-            <a:ext cx="5302840" cy="515111"/>
+            <a:off x="6045587" y="1408303"/>
+            <a:ext cx="5311260" cy="515111"/>
           </a:xfrm>
           <a:prstGeom prst="rect">
             <a:avLst/>
@@ -37640,7 +37640,7 @@
         <p:spPr>
           <a:xfrm>
             <a:off x="685800" y="1923414"/>
-            <a:ext cx="1718353" cy="515111"/>
+            <a:ext cx="1713111" cy="515111"/>
           </a:xfrm>
           <a:prstGeom prst="rect">
             <a:avLst/>
@@ -37681,8 +37681,8 @@
         </p:nvSpPr>
         <p:spPr>
           <a:xfrm>
-            <a:off x="2550457" y="1923414"/>
-            <a:ext cx="3357246" cy="515111"/>
+            <a:off x="2545215" y="1923414"/>
+            <a:ext cx="3354067" cy="515111"/>
           </a:xfrm>
           <a:prstGeom prst="rect">
             <a:avLst/>
@@ -37723,8 +37723,8 @@
         </p:nvSpPr>
         <p:spPr>
           <a:xfrm>
-            <a:off x="6054007" y="1923414"/>
-            <a:ext cx="5302840" cy="515111"/>
+            <a:off x="6045587" y="1923414"/>
+            <a:ext cx="5311260" cy="515111"/>
           </a:xfrm>
           <a:prstGeom prst="rect">
             <a:avLst/>
@@ -37810,7 +37810,7 @@
         <p:spPr>
           <a:xfrm>
             <a:off x="685800" y="2438527"/>
-            <a:ext cx="1718353" cy="865631"/>
+            <a:ext cx="1713111" cy="865631"/>
           </a:xfrm>
           <a:prstGeom prst="rect">
             <a:avLst/>
@@ -37851,8 +37851,8 @@
         </p:nvSpPr>
         <p:spPr>
           <a:xfrm>
-            <a:off x="2550457" y="2438527"/>
-            <a:ext cx="3357246" cy="865631"/>
+            <a:off x="2545215" y="2438527"/>
+            <a:ext cx="3354067" cy="865631"/>
           </a:xfrm>
           <a:prstGeom prst="rect">
             <a:avLst/>
@@ -37893,8 +37893,8 @@
         </p:nvSpPr>
         <p:spPr>
           <a:xfrm>
-            <a:off x="6054007" y="2438527"/>
-            <a:ext cx="5302840" cy="865631"/>
+            <a:off x="6045587" y="2438527"/>
+            <a:ext cx="5311260" cy="865631"/>
           </a:xfrm>
           <a:prstGeom prst="rect">
             <a:avLst/>
@@ -37971,7 +37971,7 @@
         <p:spPr>
           <a:xfrm>
             <a:off x="685800" y="3304158"/>
-            <a:ext cx="1718353" cy="690371"/>
+            <a:ext cx="1713111" cy="690371"/>
           </a:xfrm>
           <a:prstGeom prst="rect">
             <a:avLst/>
@@ -38012,8 +38012,8 @@
         </p:nvSpPr>
         <p:spPr>
           <a:xfrm>
-            <a:off x="2550457" y="3304158"/>
-            <a:ext cx="3357246" cy="690371"/>
+            <a:off x="2545215" y="3304158"/>
+            <a:ext cx="3354067" cy="690371"/>
           </a:xfrm>
           <a:prstGeom prst="rect">
             <a:avLst/>
@@ -38054,8 +38054,8 @@
         </p:nvSpPr>
         <p:spPr>
           <a:xfrm>
-            <a:off x="6054007" y="3304158"/>
-            <a:ext cx="5302840" cy="690371"/>
+            <a:off x="6045587" y="3304158"/>
+            <a:ext cx="5311260" cy="690371"/>
           </a:xfrm>
           <a:prstGeom prst="rect">
             <a:avLst/>
@@ -38132,7 +38132,7 @@
         <p:spPr>
           <a:xfrm>
             <a:off x="685800" y="3994530"/>
-            <a:ext cx="1718353" cy="515111"/>
+            <a:ext cx="1713111" cy="515111"/>
           </a:xfrm>
           <a:prstGeom prst="rect">
             <a:avLst/>
@@ -38173,8 +38173,8 @@
         </p:nvSpPr>
         <p:spPr>
           <a:xfrm>
-            <a:off x="2550457" y="3994530"/>
-            <a:ext cx="3357246" cy="515111"/>
+            <a:off x="2545215" y="3994530"/>
+            <a:ext cx="3354067" cy="515111"/>
           </a:xfrm>
           <a:prstGeom prst="rect">
             <a:avLst/>
@@ -38215,8 +38215,8 @@
         </p:nvSpPr>
         <p:spPr>
           <a:xfrm>
-            <a:off x="6054007" y="3994530"/>
-            <a:ext cx="5302840" cy="515111"/>
+            <a:off x="6045587" y="3994530"/>
+            <a:ext cx="5311260" cy="515111"/>
           </a:xfrm>
           <a:prstGeom prst="rect">
             <a:avLst/>
@@ -38898,7 +38898,7 @@
       </p:sp>
       <p:pic>
         <p:nvPicPr>
-          <p:cNvPr id="3" name="Picture 2" descr="subagent-n43-tri-yarusa.png"/>
+          <p:cNvPr id="3" name="Picture 2" descr="subagent-n43-tri-yarusa-en.png"/>
           <p:cNvPicPr>
             <a:picLocks noChangeAspect="1"/>
           </p:cNvPicPr>
@@ -38977,7 +38977,7 @@
         <p:spPr>
           <a:xfrm>
             <a:off x="685800" y="3377152"/>
-            <a:ext cx="5285213" cy="282067"/>
+            <a:ext cx="5294405" cy="282067"/>
           </a:xfrm>
           <a:prstGeom prst="rect">
             <a:avLst/>
@@ -39018,8 +39018,8 @@
         </p:nvSpPr>
         <p:spPr>
           <a:xfrm>
-            <a:off x="6117317" y="3377152"/>
-            <a:ext cx="5239530" cy="282067"/>
+            <a:off x="6126509" y="3377152"/>
+            <a:ext cx="5230338" cy="282067"/>
           </a:xfrm>
           <a:prstGeom prst="rect">
             <a:avLst/>
@@ -39061,7 +39061,7 @@
         <p:spPr>
           <a:xfrm>
             <a:off x="685800" y="3659219"/>
-            <a:ext cx="5285213" cy="515111"/>
+            <a:ext cx="5294405" cy="515111"/>
           </a:xfrm>
           <a:prstGeom prst="rect">
             <a:avLst/>
@@ -39102,8 +39102,8 @@
         </p:nvSpPr>
         <p:spPr>
           <a:xfrm>
-            <a:off x="6117317" y="3659219"/>
-            <a:ext cx="5239530" cy="515111"/>
+            <a:off x="6126509" y="3659219"/>
+            <a:ext cx="5230338" cy="515111"/>
           </a:xfrm>
           <a:prstGeom prst="rect">
             <a:avLst/>
@@ -39180,7 +39180,7 @@
         <p:spPr>
           <a:xfrm>
             <a:off x="685800" y="4174331"/>
-            <a:ext cx="5285213" cy="515111"/>
+            <a:ext cx="5294405" cy="515111"/>
           </a:xfrm>
           <a:prstGeom prst="rect">
             <a:avLst/>
@@ -39221,8 +39221,8 @@
         </p:nvSpPr>
         <p:spPr>
           <a:xfrm>
-            <a:off x="6117317" y="4174331"/>
-            <a:ext cx="5239530" cy="515111"/>
+            <a:off x="6126509" y="4174331"/>
+            <a:ext cx="5230338" cy="515111"/>
           </a:xfrm>
           <a:prstGeom prst="rect">
             <a:avLst/>
@@ -39299,7 +39299,7 @@
         <p:spPr>
           <a:xfrm>
             <a:off x="685800" y="4689443"/>
-            <a:ext cx="5285213" cy="515111"/>
+            <a:ext cx="5294405" cy="515111"/>
           </a:xfrm>
           <a:prstGeom prst="rect">
             <a:avLst/>
@@ -39340,8 +39340,8 @@
         </p:nvSpPr>
         <p:spPr>
           <a:xfrm>
-            <a:off x="6117317" y="4689443"/>
-            <a:ext cx="5239530" cy="515111"/>
+            <a:off x="6126509" y="4689443"/>
+            <a:ext cx="5230338" cy="515111"/>
           </a:xfrm>
           <a:prstGeom prst="rect">
             <a:avLst/>
@@ -39717,7 +39717,7 @@
         <p:spPr>
           <a:xfrm>
             <a:off x="685800" y="2099551"/>
-            <a:ext cx="3816954" cy="282067"/>
+            <a:ext cx="3804844" cy="282067"/>
           </a:xfrm>
           <a:prstGeom prst="rect">
             <a:avLst/>
@@ -39758,8 +39758,8 @@
         </p:nvSpPr>
         <p:spPr>
           <a:xfrm>
-            <a:off x="4649058" y="2099551"/>
-            <a:ext cx="6707789" cy="282067"/>
+            <a:off x="4636948" y="2099551"/>
+            <a:ext cx="6719899" cy="282067"/>
           </a:xfrm>
           <a:prstGeom prst="rect">
             <a:avLst/>
@@ -39801,7 +39801,7 @@
         <p:spPr>
           <a:xfrm>
             <a:off x="685800" y="2381618"/>
-            <a:ext cx="3816954" cy="529717"/>
+            <a:ext cx="3804844" cy="529717"/>
           </a:xfrm>
           <a:prstGeom prst="rect">
             <a:avLst/>
@@ -39842,8 +39842,8 @@
         </p:nvSpPr>
         <p:spPr>
           <a:xfrm>
-            <a:off x="4649058" y="2381618"/>
-            <a:ext cx="6707789" cy="529717"/>
+            <a:off x="4636948" y="2381618"/>
+            <a:ext cx="6719899" cy="529717"/>
           </a:xfrm>
           <a:prstGeom prst="rect">
             <a:avLst/>
@@ -39920,7 +39920,7 @@
         <p:spPr>
           <a:xfrm>
             <a:off x="685800" y="2911335"/>
-            <a:ext cx="3816954" cy="529717"/>
+            <a:ext cx="3804844" cy="529717"/>
           </a:xfrm>
           <a:prstGeom prst="rect">
             <a:avLst/>
@@ -39961,8 +39961,8 @@
         </p:nvSpPr>
         <p:spPr>
           <a:xfrm>
-            <a:off x="4649058" y="2911335"/>
-            <a:ext cx="6707789" cy="529717"/>
+            <a:off x="4636948" y="2911335"/>
+            <a:ext cx="6719899" cy="529717"/>
           </a:xfrm>
           <a:prstGeom prst="rect">
             <a:avLst/>
@@ -40039,7 +40039,7 @@
         <p:spPr>
           <a:xfrm>
             <a:off x="685800" y="3441052"/>
-            <a:ext cx="3816954" cy="529717"/>
+            <a:ext cx="3804844" cy="529717"/>
           </a:xfrm>
           <a:prstGeom prst="rect">
             <a:avLst/>
@@ -40080,8 +40080,8 @@
         </p:nvSpPr>
         <p:spPr>
           <a:xfrm>
-            <a:off x="4649058" y="3441052"/>
-            <a:ext cx="6707789" cy="529717"/>
+            <a:off x="4636948" y="3441052"/>
+            <a:ext cx="6719899" cy="529717"/>
           </a:xfrm>
           <a:prstGeom prst="rect">
             <a:avLst/>
@@ -40879,7 +40879,7 @@
         <p:spPr>
           <a:xfrm>
             <a:off x="685800" y="1237678"/>
-            <a:ext cx="2108555" cy="282067"/>
+            <a:ext cx="2102414" cy="282067"/>
           </a:xfrm>
           <a:prstGeom prst="rect">
             <a:avLst/>
@@ -40920,8 +40920,8 @@
         </p:nvSpPr>
         <p:spPr>
           <a:xfrm>
-            <a:off x="2940659" y="1237678"/>
-            <a:ext cx="3004658" cy="282067"/>
+            <a:off x="2934518" y="1237678"/>
+            <a:ext cx="3003514" cy="282067"/>
           </a:xfrm>
           <a:prstGeom prst="rect">
             <a:avLst/>
@@ -40962,8 +40962,8 @@
         </p:nvSpPr>
         <p:spPr>
           <a:xfrm>
-            <a:off x="6091621" y="1237678"/>
-            <a:ext cx="5265226" cy="282067"/>
+            <a:off x="6084336" y="1237678"/>
+            <a:ext cx="5272511" cy="282067"/>
           </a:xfrm>
           <a:prstGeom prst="rect">
             <a:avLst/>
@@ -41005,7 +41005,7 @@
         <p:spPr>
           <a:xfrm>
             <a:off x="685800" y="1519745"/>
-            <a:ext cx="2108555" cy="712279"/>
+            <a:ext cx="2102414" cy="712279"/>
           </a:xfrm>
           <a:prstGeom prst="rect">
             <a:avLst/>
@@ -41046,8 +41046,8 @@
         </p:nvSpPr>
         <p:spPr>
           <a:xfrm>
-            <a:off x="2940659" y="1519745"/>
-            <a:ext cx="3004658" cy="712279"/>
+            <a:off x="2934518" y="1519745"/>
+            <a:ext cx="3003514" cy="712279"/>
           </a:xfrm>
           <a:prstGeom prst="rect">
             <a:avLst/>
@@ -41088,8 +41088,8 @@
         </p:nvSpPr>
         <p:spPr>
           <a:xfrm>
-            <a:off x="6091621" y="1519745"/>
-            <a:ext cx="5265226" cy="712279"/>
+            <a:off x="6084336" y="1519745"/>
+            <a:ext cx="5272511" cy="712279"/>
           </a:xfrm>
           <a:prstGeom prst="rect">
             <a:avLst/>
@@ -41166,7 +41166,7 @@
         <p:spPr>
           <a:xfrm>
             <a:off x="685800" y="2232025"/>
-            <a:ext cx="2108555" cy="894842"/>
+            <a:ext cx="2102414" cy="894842"/>
           </a:xfrm>
           <a:prstGeom prst="rect">
             <a:avLst/>
@@ -41207,8 +41207,8 @@
         </p:nvSpPr>
         <p:spPr>
           <a:xfrm>
-            <a:off x="2940659" y="2232025"/>
-            <a:ext cx="3004658" cy="894842"/>
+            <a:off x="2934518" y="2232025"/>
+            <a:ext cx="3003514" cy="894842"/>
           </a:xfrm>
           <a:prstGeom prst="rect">
             <a:avLst/>
@@ -41249,8 +41249,8 @@
         </p:nvSpPr>
         <p:spPr>
           <a:xfrm>
-            <a:off x="6091621" y="2232025"/>
-            <a:ext cx="5265226" cy="894842"/>
+            <a:off x="6084336" y="2232025"/>
+            <a:ext cx="5272511" cy="894842"/>
           </a:xfrm>
           <a:prstGeom prst="rect">
             <a:avLst/>
@@ -41327,7 +41327,7 @@
         <p:spPr>
           <a:xfrm>
             <a:off x="685800" y="3126867"/>
-            <a:ext cx="2108555" cy="712279"/>
+            <a:ext cx="2102414" cy="712279"/>
           </a:xfrm>
           <a:prstGeom prst="rect">
             <a:avLst/>
@@ -41368,8 +41368,8 @@
         </p:nvSpPr>
         <p:spPr>
           <a:xfrm>
-            <a:off x="2940659" y="3126867"/>
-            <a:ext cx="3004658" cy="712279"/>
+            <a:off x="2934518" y="3126867"/>
+            <a:ext cx="3003514" cy="712279"/>
           </a:xfrm>
           <a:prstGeom prst="rect">
             <a:avLst/>
@@ -41410,8 +41410,8 @@
         </p:nvSpPr>
         <p:spPr>
           <a:xfrm>
-            <a:off x="6091621" y="3126867"/>
-            <a:ext cx="5265226" cy="712279"/>
+            <a:off x="6084336" y="3126867"/>
+            <a:ext cx="5272511" cy="712279"/>
           </a:xfrm>
           <a:prstGeom prst="rect">
             <a:avLst/>
@@ -41488,7 +41488,7 @@
         <p:spPr>
           <a:xfrm>
             <a:off x="685800" y="3839146"/>
-            <a:ext cx="2108555" cy="712279"/>
+            <a:ext cx="2102414" cy="712279"/>
           </a:xfrm>
           <a:prstGeom prst="rect">
             <a:avLst/>
@@ -41529,8 +41529,8 @@
         </p:nvSpPr>
         <p:spPr>
           <a:xfrm>
-            <a:off x="2940659" y="3839146"/>
-            <a:ext cx="3004658" cy="712279"/>
+            <a:off x="2934518" y="3839146"/>
+            <a:ext cx="3003514" cy="712279"/>
           </a:xfrm>
           <a:prstGeom prst="rect">
             <a:avLst/>
@@ -41571,8 +41571,8 @@
         </p:nvSpPr>
         <p:spPr>
           <a:xfrm>
-            <a:off x="6091621" y="3839146"/>
-            <a:ext cx="5265226" cy="712279"/>
+            <a:off x="6084336" y="3839146"/>
+            <a:ext cx="5272511" cy="712279"/>
           </a:xfrm>
           <a:prstGeom prst="rect">
             <a:avLst/>
@@ -42012,7 +42012,7 @@
         <p:spPr>
           <a:xfrm>
             <a:off x="685800" y="2561162"/>
-            <a:ext cx="1584213" cy="282067"/>
+            <a:ext cx="1587893" cy="282067"/>
           </a:xfrm>
           <a:prstGeom prst="rect">
             <a:avLst/>
@@ -42053,8 +42053,8 @@
         </p:nvSpPr>
         <p:spPr>
           <a:xfrm>
-            <a:off x="2416317" y="2561162"/>
-            <a:ext cx="6158657" cy="282067"/>
+            <a:off x="2419997" y="2561162"/>
+            <a:ext cx="6136175" cy="282067"/>
           </a:xfrm>
           <a:prstGeom prst="rect">
             <a:avLst/>
@@ -42095,8 +42095,8 @@
         </p:nvSpPr>
         <p:spPr>
           <a:xfrm>
-            <a:off x="8721278" y="2561162"/>
-            <a:ext cx="2635569" cy="282067"/>
+            <a:off x="8702477" y="2561162"/>
+            <a:ext cx="2654370" cy="282067"/>
           </a:xfrm>
           <a:prstGeom prst="rect">
             <a:avLst/>
@@ -42138,7 +42138,7 @@
         <p:spPr>
           <a:xfrm>
             <a:off x="685800" y="2843229"/>
-            <a:ext cx="1584213" cy="1077404"/>
+            <a:ext cx="1587893" cy="1077404"/>
           </a:xfrm>
           <a:prstGeom prst="rect">
             <a:avLst/>
@@ -42179,8 +42179,8 @@
         </p:nvSpPr>
         <p:spPr>
           <a:xfrm>
-            <a:off x="2416317" y="2843229"/>
-            <a:ext cx="6158657" cy="1077404"/>
+            <a:off x="2419997" y="2843229"/>
+            <a:ext cx="6136175" cy="1077404"/>
           </a:xfrm>
           <a:prstGeom prst="rect">
             <a:avLst/>
@@ -42221,8 +42221,8 @@
         </p:nvSpPr>
         <p:spPr>
           <a:xfrm>
-            <a:off x="8721278" y="2843229"/>
-            <a:ext cx="2635569" cy="1077404"/>
+            <a:off x="8702477" y="2843229"/>
+            <a:ext cx="2654370" cy="1077404"/>
           </a:xfrm>
           <a:prstGeom prst="rect">
             <a:avLst/>
@@ -42299,7 +42299,7 @@
         <p:spPr>
           <a:xfrm>
             <a:off x="685800" y="3920633"/>
-            <a:ext cx="1584213" cy="894842"/>
+            <a:ext cx="1587893" cy="894842"/>
           </a:xfrm>
           <a:prstGeom prst="rect">
             <a:avLst/>
@@ -42340,8 +42340,8 @@
         </p:nvSpPr>
         <p:spPr>
           <a:xfrm>
-            <a:off x="2416317" y="3920633"/>
-            <a:ext cx="6158657" cy="894842"/>
+            <a:off x="2419997" y="3920633"/>
+            <a:ext cx="6136175" cy="894842"/>
           </a:xfrm>
           <a:prstGeom prst="rect">
             <a:avLst/>
@@ -42382,8 +42382,8 @@
         </p:nvSpPr>
         <p:spPr>
           <a:xfrm>
-            <a:off x="8721278" y="3920633"/>
-            <a:ext cx="2635569" cy="894842"/>
+            <a:off x="8702477" y="3920633"/>
+            <a:ext cx="2654370" cy="894842"/>
           </a:xfrm>
           <a:prstGeom prst="rect">
             <a:avLst/>
@@ -42628,7 +42628,7 @@
       </p:sp>
       <p:pic>
         <p:nvPicPr>
-          <p:cNvPr id="3" name="Picture 2" descr="subagent-n48-granitsa-dvukh-zon.png"/>
+          <p:cNvPr id="3" name="Picture 2" descr="subagent-n48-granitsa-dvukh-zon-en.png"/>
           <p:cNvPicPr>
             <a:picLocks noChangeAspect="1"/>
           </p:cNvPicPr>
@@ -43869,7 +43869,7 @@
         <p:spPr>
           <a:xfrm>
             <a:off x="685800" y="1760702"/>
-            <a:ext cx="2322347" cy="282067"/>
+            <a:ext cx="2323076" cy="282067"/>
           </a:xfrm>
           <a:prstGeom prst="rect">
             <a:avLst/>
@@ -43910,8 +43910,8 @@
         </p:nvSpPr>
         <p:spPr>
           <a:xfrm>
-            <a:off x="3154451" y="1760702"/>
-            <a:ext cx="3808722" cy="282067"/>
+            <a:off x="3155180" y="1760702"/>
+            <a:ext cx="3807779" cy="282067"/>
           </a:xfrm>
           <a:prstGeom prst="rect">
             <a:avLst/>
@@ -43952,8 +43952,8 @@
         </p:nvSpPr>
         <p:spPr>
           <a:xfrm>
-            <a:off x="7109478" y="1760702"/>
-            <a:ext cx="2817956" cy="282067"/>
+            <a:off x="7109263" y="1760702"/>
+            <a:ext cx="2813324" cy="282067"/>
           </a:xfrm>
           <a:prstGeom prst="rect">
             <a:avLst/>
@@ -43994,8 +43994,8 @@
         </p:nvSpPr>
         <p:spPr>
           <a:xfrm>
-            <a:off x="10073738" y="1760702"/>
-            <a:ext cx="1283109" cy="282067"/>
+            <a:off x="10068891" y="1760702"/>
+            <a:ext cx="1287956" cy="282067"/>
           </a:xfrm>
           <a:prstGeom prst="rect">
             <a:avLst/>
@@ -44037,7 +44037,7 @@
         <p:spPr>
           <a:xfrm>
             <a:off x="685800" y="2042769"/>
-            <a:ext cx="2322347" cy="712279"/>
+            <a:ext cx="2323076" cy="712279"/>
           </a:xfrm>
           <a:prstGeom prst="rect">
             <a:avLst/>
@@ -44078,8 +44078,8 @@
         </p:nvSpPr>
         <p:spPr>
           <a:xfrm>
-            <a:off x="3154451" y="2042769"/>
-            <a:ext cx="3808722" cy="712279"/>
+            <a:off x="3155180" y="2042769"/>
+            <a:ext cx="3807779" cy="712279"/>
           </a:xfrm>
           <a:prstGeom prst="rect">
             <a:avLst/>
@@ -44120,8 +44120,8 @@
         </p:nvSpPr>
         <p:spPr>
           <a:xfrm>
-            <a:off x="7109478" y="2042769"/>
-            <a:ext cx="2817956" cy="712279"/>
+            <a:off x="7109263" y="2042769"/>
+            <a:ext cx="2813324" cy="712279"/>
           </a:xfrm>
           <a:prstGeom prst="rect">
             <a:avLst/>
@@ -44162,8 +44162,8 @@
         </p:nvSpPr>
         <p:spPr>
           <a:xfrm>
-            <a:off x="10073738" y="2042769"/>
-            <a:ext cx="1283109" cy="712279"/>
+            <a:off x="10068891" y="2042769"/>
+            <a:ext cx="1287956" cy="712279"/>
           </a:xfrm>
           <a:prstGeom prst="rect">
             <a:avLst/>
@@ -44240,7 +44240,7 @@
         <p:spPr>
           <a:xfrm>
             <a:off x="685800" y="2755049"/>
-            <a:ext cx="2322347" cy="1259966"/>
+            <a:ext cx="2323076" cy="1259966"/>
           </a:xfrm>
           <a:prstGeom prst="rect">
             <a:avLst/>
@@ -44281,8 +44281,8 @@
         </p:nvSpPr>
         <p:spPr>
           <a:xfrm>
-            <a:off x="3154451" y="2755049"/>
-            <a:ext cx="3808722" cy="1259966"/>
+            <a:off x="3155180" y="2755049"/>
+            <a:ext cx="3807779" cy="1259966"/>
           </a:xfrm>
           <a:prstGeom prst="rect">
             <a:avLst/>
@@ -44323,8 +44323,8 @@
         </p:nvSpPr>
         <p:spPr>
           <a:xfrm>
-            <a:off x="7109478" y="2755049"/>
-            <a:ext cx="2817956" cy="1259966"/>
+            <a:off x="7109263" y="2755049"/>
+            <a:ext cx="2813324" cy="1259966"/>
           </a:xfrm>
           <a:prstGeom prst="rect">
             <a:avLst/>
@@ -44365,8 +44365,8 @@
         </p:nvSpPr>
         <p:spPr>
           <a:xfrm>
-            <a:off x="10073738" y="2755049"/>
-            <a:ext cx="1283109" cy="1259966"/>
+            <a:off x="10068891" y="2755049"/>
+            <a:ext cx="1287956" cy="1259966"/>
           </a:xfrm>
           <a:prstGeom prst="rect">
             <a:avLst/>
@@ -46829,7 +46829,7 @@
         <p:spPr>
           <a:xfrm>
             <a:off x="685800" y="1126236"/>
-            <a:ext cx="1572401" cy="282067"/>
+            <a:ext cx="1567654" cy="282067"/>
           </a:xfrm>
           <a:prstGeom prst="rect">
             <a:avLst/>
@@ -46870,8 +46870,8 @@
         </p:nvSpPr>
         <p:spPr>
           <a:xfrm>
-            <a:off x="2404505" y="1126236"/>
-            <a:ext cx="4401819" cy="282067"/>
+            <a:off x="2399758" y="1126236"/>
+            <a:ext cx="4394573" cy="282067"/>
           </a:xfrm>
           <a:prstGeom prst="rect">
             <a:avLst/>
@@ -46912,8 +46912,8 @@
         </p:nvSpPr>
         <p:spPr>
           <a:xfrm>
-            <a:off x="6952628" y="1126236"/>
-            <a:ext cx="4404219" cy="282067"/>
+            <a:off x="6940635" y="1126236"/>
+            <a:ext cx="4416212" cy="282067"/>
           </a:xfrm>
           <a:prstGeom prst="rect">
             <a:avLst/>
@@ -46955,7 +46955,7 @@
         <p:spPr>
           <a:xfrm>
             <a:off x="685800" y="1408303"/>
-            <a:ext cx="1572401" cy="690371"/>
+            <a:ext cx="1567654" cy="690371"/>
           </a:xfrm>
           <a:prstGeom prst="rect">
             <a:avLst/>
@@ -46996,8 +46996,8 @@
         </p:nvSpPr>
         <p:spPr>
           <a:xfrm>
-            <a:off x="2404505" y="1408303"/>
-            <a:ext cx="4401819" cy="690371"/>
+            <a:off x="2399758" y="1408303"/>
+            <a:ext cx="4394573" cy="690371"/>
           </a:xfrm>
           <a:prstGeom prst="rect">
             <a:avLst/>
@@ -47038,8 +47038,8 @@
         </p:nvSpPr>
         <p:spPr>
           <a:xfrm>
-            <a:off x="6952628" y="1408303"/>
-            <a:ext cx="4404219" cy="690371"/>
+            <a:off x="6940635" y="1408303"/>
+            <a:ext cx="4416212" cy="690371"/>
           </a:xfrm>
           <a:prstGeom prst="rect">
             <a:avLst/>
@@ -47116,7 +47116,7 @@
         <p:spPr>
           <a:xfrm>
             <a:off x="685800" y="2098675"/>
-            <a:ext cx="1572401" cy="515111"/>
+            <a:ext cx="1567654" cy="515111"/>
           </a:xfrm>
           <a:prstGeom prst="rect">
             <a:avLst/>
@@ -47157,8 +47157,8 @@
         </p:nvSpPr>
         <p:spPr>
           <a:xfrm>
-            <a:off x="2404505" y="2098675"/>
-            <a:ext cx="4401819" cy="515111"/>
+            <a:off x="2399758" y="2098675"/>
+            <a:ext cx="4394573" cy="515111"/>
           </a:xfrm>
           <a:prstGeom prst="rect">
             <a:avLst/>
@@ -47199,8 +47199,8 @@
         </p:nvSpPr>
         <p:spPr>
           <a:xfrm>
-            <a:off x="6952628" y="2098675"/>
-            <a:ext cx="4404219" cy="515111"/>
+            <a:off x="6940635" y="2098675"/>
+            <a:ext cx="4416212" cy="515111"/>
           </a:xfrm>
           <a:prstGeom prst="rect">
             <a:avLst/>
@@ -47277,7 +47277,7 @@
         <p:spPr>
           <a:xfrm>
             <a:off x="685800" y="2613786"/>
-            <a:ext cx="1572401" cy="690371"/>
+            <a:ext cx="1567654" cy="690371"/>
           </a:xfrm>
           <a:prstGeom prst="rect">
             <a:avLst/>
@@ -47318,8 +47318,8 @@
         </p:nvSpPr>
         <p:spPr>
           <a:xfrm>
-            <a:off x="2404505" y="2613786"/>
-            <a:ext cx="4401819" cy="690371"/>
+            <a:off x="2399758" y="2613786"/>
+            <a:ext cx="4394573" cy="690371"/>
           </a:xfrm>
           <a:prstGeom prst="rect">
             <a:avLst/>
@@ -47360,8 +47360,8 @@
         </p:nvSpPr>
         <p:spPr>
           <a:xfrm>
-            <a:off x="6952628" y="2613786"/>
-            <a:ext cx="4404219" cy="690371"/>
+            <a:off x="6940635" y="2613786"/>
+            <a:ext cx="4416212" cy="690371"/>
           </a:xfrm>
           <a:prstGeom prst="rect">
             <a:avLst/>
@@ -47438,7 +47438,7 @@
         <p:spPr>
           <a:xfrm>
             <a:off x="685800" y="3304158"/>
-            <a:ext cx="1572401" cy="690371"/>
+            <a:ext cx="1567654" cy="690371"/>
           </a:xfrm>
           <a:prstGeom prst="rect">
             <a:avLst/>
@@ -47479,8 +47479,8 @@
         </p:nvSpPr>
         <p:spPr>
           <a:xfrm>
-            <a:off x="2404505" y="3304158"/>
-            <a:ext cx="4401819" cy="690371"/>
+            <a:off x="2399758" y="3304158"/>
+            <a:ext cx="4394573" cy="690371"/>
           </a:xfrm>
           <a:prstGeom prst="rect">
             <a:avLst/>
@@ -47521,8 +47521,8 @@
         </p:nvSpPr>
         <p:spPr>
           <a:xfrm>
-            <a:off x="6952628" y="3304158"/>
-            <a:ext cx="4404219" cy="690371"/>
+            <a:off x="6940635" y="3304158"/>
+            <a:ext cx="4416212" cy="690371"/>
           </a:xfrm>
           <a:prstGeom prst="rect">
             <a:avLst/>
@@ -47599,7 +47599,7 @@
         <p:spPr>
           <a:xfrm>
             <a:off x="685800" y="3994530"/>
-            <a:ext cx="1572401" cy="515111"/>
+            <a:ext cx="1567654" cy="515111"/>
           </a:xfrm>
           <a:prstGeom prst="rect">
             <a:avLst/>
@@ -47640,8 +47640,8 @@
         </p:nvSpPr>
         <p:spPr>
           <a:xfrm>
-            <a:off x="2404505" y="3994530"/>
-            <a:ext cx="4401819" cy="515111"/>
+            <a:off x="2399758" y="3994530"/>
+            <a:ext cx="4394573" cy="515111"/>
           </a:xfrm>
           <a:prstGeom prst="rect">
             <a:avLst/>
@@ -47682,8 +47682,8 @@
         </p:nvSpPr>
         <p:spPr>
           <a:xfrm>
-            <a:off x="6952628" y="3994530"/>
-            <a:ext cx="4404219" cy="515111"/>
+            <a:off x="6940635" y="3994530"/>
+            <a:ext cx="4416212" cy="515111"/>
           </a:xfrm>
           <a:prstGeom prst="rect">
             <a:avLst/>
@@ -48248,7 +48248,7 @@
         <p:spPr>
           <a:xfrm>
             <a:off x="685800" y="2948495"/>
-            <a:ext cx="4585442" cy="282067"/>
+            <a:ext cx="4586765" cy="282067"/>
           </a:xfrm>
           <a:prstGeom prst="rect">
             <a:avLst/>
@@ -48289,8 +48289,8 @@
         </p:nvSpPr>
         <p:spPr>
           <a:xfrm>
-            <a:off x="5417546" y="2948495"/>
-            <a:ext cx="5939301" cy="282067"/>
+            <a:off x="5418869" y="2948495"/>
+            <a:ext cx="5937978" cy="282067"/>
           </a:xfrm>
           <a:prstGeom prst="rect">
             <a:avLst/>
@@ -48332,7 +48332,7 @@
         <p:spPr>
           <a:xfrm>
             <a:off x="685800" y="3230562"/>
-            <a:ext cx="4585442" cy="712279"/>
+            <a:ext cx="4586765" cy="712279"/>
           </a:xfrm>
           <a:prstGeom prst="rect">
             <a:avLst/>
@@ -48373,8 +48373,8 @@
         </p:nvSpPr>
         <p:spPr>
           <a:xfrm>
-            <a:off x="5417546" y="3230562"/>
-            <a:ext cx="5939301" cy="712279"/>
+            <a:off x="5418869" y="3230562"/>
+            <a:ext cx="5937978" cy="712279"/>
           </a:xfrm>
           <a:prstGeom prst="rect">
             <a:avLst/>
@@ -48451,7 +48451,7 @@
         <p:spPr>
           <a:xfrm>
             <a:off x="685800" y="3942842"/>
-            <a:ext cx="4585442" cy="347154"/>
+            <a:ext cx="4586765" cy="347154"/>
           </a:xfrm>
           <a:prstGeom prst="rect">
             <a:avLst/>
@@ -48492,8 +48492,8 @@
         </p:nvSpPr>
         <p:spPr>
           <a:xfrm>
-            <a:off x="5417546" y="3942842"/>
-            <a:ext cx="5939301" cy="347154"/>
+            <a:off x="5418869" y="3942842"/>
+            <a:ext cx="5937978" cy="347154"/>
           </a:xfrm>
           <a:prstGeom prst="rect">
             <a:avLst/>
@@ -48570,7 +48570,7 @@
         <p:spPr>
           <a:xfrm>
             <a:off x="685800" y="4289996"/>
-            <a:ext cx="4585442" cy="712279"/>
+            <a:ext cx="4586765" cy="712279"/>
           </a:xfrm>
           <a:prstGeom prst="rect">
             <a:avLst/>
@@ -48611,8 +48611,8 @@
         </p:nvSpPr>
         <p:spPr>
           <a:xfrm>
-            <a:off x="5417546" y="4289996"/>
-            <a:ext cx="5939301" cy="712279"/>
+            <a:off x="5418869" y="4289996"/>
+            <a:ext cx="5937978" cy="712279"/>
           </a:xfrm>
           <a:prstGeom prst="rect">
             <a:avLst/>
@@ -49757,7 +49757,7 @@
         <p:spPr>
           <a:xfrm>
             <a:off x="685800" y="2501095"/>
-            <a:ext cx="4816365" cy="282067"/>
+            <a:ext cx="4814072" cy="282067"/>
           </a:xfrm>
           <a:prstGeom prst="rect">
             <a:avLst/>
@@ -49798,8 +49798,8 @@
         </p:nvSpPr>
         <p:spPr>
           <a:xfrm>
-            <a:off x="5648469" y="2501095"/>
-            <a:ext cx="5708378" cy="282067"/>
+            <a:off x="5646176" y="2501095"/>
+            <a:ext cx="5710671" cy="282067"/>
           </a:xfrm>
           <a:prstGeom prst="rect">
             <a:avLst/>
@@ -49841,7 +49841,7 @@
         <p:spPr>
           <a:xfrm>
             <a:off x="685800" y="2783162"/>
-            <a:ext cx="4816365" cy="712279"/>
+            <a:ext cx="4814072" cy="712279"/>
           </a:xfrm>
           <a:prstGeom prst="rect">
             <a:avLst/>
@@ -49882,8 +49882,8 @@
         </p:nvSpPr>
         <p:spPr>
           <a:xfrm>
-            <a:off x="5648469" y="2783162"/>
-            <a:ext cx="5708378" cy="712279"/>
+            <a:off x="5646176" y="2783162"/>
+            <a:ext cx="5710671" cy="712279"/>
           </a:xfrm>
           <a:prstGeom prst="rect">
             <a:avLst/>
@@ -49960,7 +49960,7 @@
         <p:spPr>
           <a:xfrm>
             <a:off x="685800" y="3495442"/>
-            <a:ext cx="4816365" cy="712279"/>
+            <a:ext cx="4814072" cy="712279"/>
           </a:xfrm>
           <a:prstGeom prst="rect">
             <a:avLst/>
@@ -50001,8 +50001,8 @@
         </p:nvSpPr>
         <p:spPr>
           <a:xfrm>
-            <a:off x="5648469" y="3495442"/>
-            <a:ext cx="5708378" cy="712279"/>
+            <a:off x="5646176" y="3495442"/>
+            <a:ext cx="5710671" cy="712279"/>
           </a:xfrm>
           <a:prstGeom prst="rect">
             <a:avLst/>
@@ -50079,7 +50079,7 @@
         <p:spPr>
           <a:xfrm>
             <a:off x="685800" y="4207721"/>
-            <a:ext cx="4816365" cy="529717"/>
+            <a:ext cx="4814072" cy="529717"/>
           </a:xfrm>
           <a:prstGeom prst="rect">
             <a:avLst/>
@@ -50120,8 +50120,8 @@
         </p:nvSpPr>
         <p:spPr>
           <a:xfrm>
-            <a:off x="5648469" y="4207721"/>
-            <a:ext cx="5708378" cy="529717"/>
+            <a:off x="5646176" y="4207721"/>
+            <a:ext cx="5710671" cy="529717"/>
           </a:xfrm>
           <a:prstGeom prst="rect">
             <a:avLst/>
@@ -51575,7 +51575,7 @@
         <p:spPr>
           <a:xfrm>
             <a:off x="685800" y="1927352"/>
-            <a:ext cx="3382718" cy="282067"/>
+            <a:ext cx="3343435" cy="282067"/>
           </a:xfrm>
           <a:prstGeom prst="rect">
             <a:avLst/>
@@ -51616,8 +51616,8 @@
         </p:nvSpPr>
         <p:spPr>
           <a:xfrm>
-            <a:off x="4214822" y="1927352"/>
-            <a:ext cx="2285687" cy="282067"/>
+            <a:off x="4175539" y="1927352"/>
+            <a:ext cx="2337662" cy="282067"/>
           </a:xfrm>
           <a:prstGeom prst="rect">
             <a:avLst/>
@@ -51658,8 +51658,8 @@
         </p:nvSpPr>
         <p:spPr>
           <a:xfrm>
-            <a:off x="6646814" y="1927352"/>
-            <a:ext cx="4710033" cy="282067"/>
+            <a:off x="6659505" y="1927352"/>
+            <a:ext cx="4697342" cy="282067"/>
           </a:xfrm>
           <a:prstGeom prst="rect">
             <a:avLst/>
@@ -51701,7 +51701,7 @@
         <p:spPr>
           <a:xfrm>
             <a:off x="685800" y="2209419"/>
-            <a:ext cx="3382718" cy="668464"/>
+            <a:ext cx="3343435" cy="668464"/>
           </a:xfrm>
           <a:prstGeom prst="rect">
             <a:avLst/>
@@ -51742,8 +51742,8 @@
         </p:nvSpPr>
         <p:spPr>
           <a:xfrm>
-            <a:off x="4214822" y="2209419"/>
-            <a:ext cx="2285687" cy="668464"/>
+            <a:off x="4175539" y="2209419"/>
+            <a:ext cx="2337662" cy="668464"/>
           </a:xfrm>
           <a:prstGeom prst="rect">
             <a:avLst/>
@@ -51784,8 +51784,8 @@
         </p:nvSpPr>
         <p:spPr>
           <a:xfrm>
-            <a:off x="6646814" y="2209419"/>
-            <a:ext cx="4710033" cy="668464"/>
+            <a:off x="6659505" y="2209419"/>
+            <a:ext cx="4697342" cy="668464"/>
           </a:xfrm>
           <a:prstGeom prst="rect">
             <a:avLst/>
@@ -51862,7 +51862,7 @@
         <p:spPr>
           <a:xfrm>
             <a:off x="685800" y="2877883"/>
-            <a:ext cx="3382718" cy="668464"/>
+            <a:ext cx="3343435" cy="668464"/>
           </a:xfrm>
           <a:prstGeom prst="rect">
             <a:avLst/>
@@ -51903,8 +51903,8 @@
         </p:nvSpPr>
         <p:spPr>
           <a:xfrm>
-            <a:off x="4214822" y="2877883"/>
-            <a:ext cx="2285687" cy="668464"/>
+            <a:off x="4175539" y="2877883"/>
+            <a:ext cx="2337662" cy="668464"/>
           </a:xfrm>
           <a:prstGeom prst="rect">
             <a:avLst/>
@@ -51945,8 +51945,8 @@
         </p:nvSpPr>
         <p:spPr>
           <a:xfrm>
-            <a:off x="6646814" y="2877883"/>
-            <a:ext cx="4710033" cy="668464"/>
+            <a:off x="6659505" y="2877883"/>
+            <a:ext cx="4697342" cy="668464"/>
           </a:xfrm>
           <a:prstGeom prst="rect">
             <a:avLst/>
@@ -52023,7 +52023,7 @@
         <p:spPr>
           <a:xfrm>
             <a:off x="685800" y="3546347"/>
-            <a:ext cx="3382718" cy="668464"/>
+            <a:ext cx="3343435" cy="668464"/>
           </a:xfrm>
           <a:prstGeom prst="rect">
             <a:avLst/>
@@ -52064,8 +52064,8 @@
         </p:nvSpPr>
         <p:spPr>
           <a:xfrm>
-            <a:off x="4214822" y="3546347"/>
-            <a:ext cx="2285687" cy="668464"/>
+            <a:off x="4175539" y="3546347"/>
+            <a:ext cx="2337662" cy="668464"/>
           </a:xfrm>
           <a:prstGeom prst="rect">
             <a:avLst/>
@@ -52093,7 +52093,7 @@
                 </a:solidFill>
                 <a:latin typeface="Arial"/>
               </a:rPr>
-              <a:t>each session saw its own branch in place — at the moment it looked</a:t>
+              <a:t>each session saw its own branch in place — at the moment it was looking</a:t>
             </a:r>
           </a:p>
         </p:txBody>
@@ -52106,8 +52106,8 @@
         </p:nvSpPr>
         <p:spPr>
           <a:xfrm>
-            <a:off x="6646814" y="3546347"/>
-            <a:ext cx="4710033" cy="668464"/>
+            <a:off x="6659505" y="3546347"/>
+            <a:ext cx="4697342" cy="668464"/>
           </a:xfrm>
           <a:prstGeom prst="rect">
             <a:avLst/>
@@ -56257,7 +56257,7 @@
         <p:spPr>
           <a:xfrm>
             <a:off x="2046803" y="1881733"/>
-            <a:ext cx="6275072" cy="282067"/>
+            <a:ext cx="6280025" cy="282067"/>
           </a:xfrm>
           <a:prstGeom prst="rect">
             <a:avLst/>
@@ -56298,8 +56298,8 @@
         </p:nvSpPr>
         <p:spPr>
           <a:xfrm>
-            <a:off x="8468179" y="1881733"/>
-            <a:ext cx="2888668" cy="282067"/>
+            <a:off x="8473133" y="1881733"/>
+            <a:ext cx="2883714" cy="282067"/>
           </a:xfrm>
           <a:prstGeom prst="rect">
             <a:avLst/>
@@ -56383,7 +56383,7 @@
         <p:spPr>
           <a:xfrm>
             <a:off x="2046803" y="2163800"/>
-            <a:ext cx="6275072" cy="347154"/>
+            <a:ext cx="6280025" cy="347154"/>
           </a:xfrm>
           <a:prstGeom prst="rect">
             <a:avLst/>
@@ -56442,8 +56442,8 @@
         </p:nvSpPr>
         <p:spPr>
           <a:xfrm>
-            <a:off x="8468179" y="2163800"/>
-            <a:ext cx="2888668" cy="347154"/>
+            <a:off x="8473133" y="2163800"/>
+            <a:ext cx="2883714" cy="347154"/>
           </a:xfrm>
           <a:prstGeom prst="rect">
             <a:avLst/>
@@ -56562,7 +56562,7 @@
         <p:spPr>
           <a:xfrm>
             <a:off x="2046803" y="2510955"/>
-            <a:ext cx="6275072" cy="347154"/>
+            <a:ext cx="6280025" cy="347154"/>
           </a:xfrm>
           <a:prstGeom prst="rect">
             <a:avLst/>
@@ -56603,8 +56603,8 @@
         </p:nvSpPr>
         <p:spPr>
           <a:xfrm>
-            <a:off x="8468179" y="2510955"/>
-            <a:ext cx="2888668" cy="347154"/>
+            <a:off x="8473133" y="2510955"/>
+            <a:ext cx="2883714" cy="347154"/>
           </a:xfrm>
           <a:prstGeom prst="rect">
             <a:avLst/>
@@ -56723,7 +56723,7 @@
         <p:spPr>
           <a:xfrm>
             <a:off x="2046803" y="2858109"/>
-            <a:ext cx="6275072" cy="347154"/>
+            <a:ext cx="6280025" cy="347154"/>
           </a:xfrm>
           <a:prstGeom prst="rect">
             <a:avLst/>
@@ -56764,8 +56764,8 @@
         </p:nvSpPr>
         <p:spPr>
           <a:xfrm>
-            <a:off x="8468179" y="2858109"/>
-            <a:ext cx="2888668" cy="347154"/>
+            <a:off x="8473133" y="2858109"/>
+            <a:ext cx="2883714" cy="347154"/>
           </a:xfrm>
           <a:prstGeom prst="rect">
             <a:avLst/>
@@ -56884,7 +56884,7 @@
         <p:spPr>
           <a:xfrm>
             <a:off x="2046803" y="3205264"/>
-            <a:ext cx="6275072" cy="347154"/>
+            <a:ext cx="6280025" cy="347154"/>
           </a:xfrm>
           <a:prstGeom prst="rect">
             <a:avLst/>
@@ -56925,8 +56925,8 @@
         </p:nvSpPr>
         <p:spPr>
           <a:xfrm>
-            <a:off x="8468179" y="3205264"/>
-            <a:ext cx="2888668" cy="347154"/>
+            <a:off x="8473133" y="3205264"/>
+            <a:ext cx="2883714" cy="347154"/>
           </a:xfrm>
           <a:prstGeom prst="rect">
             <a:avLst/>
@@ -57045,7 +57045,7 @@
         <p:spPr>
           <a:xfrm>
             <a:off x="2046803" y="3552418"/>
-            <a:ext cx="6275072" cy="529717"/>
+            <a:ext cx="6280025" cy="529717"/>
           </a:xfrm>
           <a:prstGeom prst="rect">
             <a:avLst/>
@@ -57095,8 +57095,8 @@
         </p:nvSpPr>
         <p:spPr>
           <a:xfrm>
-            <a:off x="8468179" y="3552418"/>
-            <a:ext cx="2888668" cy="529717"/>
+            <a:off x="8473133" y="3552418"/>
+            <a:ext cx="2883714" cy="529717"/>
           </a:xfrm>
           <a:prstGeom prst="rect">
             <a:avLst/>
@@ -57215,7 +57215,7 @@
         <p:spPr>
           <a:xfrm>
             <a:off x="2046803" y="4082135"/>
-            <a:ext cx="6275072" cy="529717"/>
+            <a:ext cx="6280025" cy="529717"/>
           </a:xfrm>
           <a:prstGeom prst="rect">
             <a:avLst/>
@@ -57328,8 +57328,8 @@
         </p:nvSpPr>
         <p:spPr>
           <a:xfrm>
-            <a:off x="8468179" y="4082135"/>
-            <a:ext cx="2888668" cy="529717"/>
+            <a:off x="8473133" y="4082135"/>
+            <a:ext cx="2883714" cy="529717"/>
           </a:xfrm>
           <a:prstGeom prst="rect">
             <a:avLst/>
@@ -57448,7 +57448,7 @@
         <p:spPr>
           <a:xfrm>
             <a:off x="2046803" y="4611852"/>
-            <a:ext cx="6275072" cy="529717"/>
+            <a:ext cx="6280025" cy="529717"/>
           </a:xfrm>
           <a:prstGeom prst="rect">
             <a:avLst/>
@@ -57534,8 +57534,8 @@
         </p:nvSpPr>
         <p:spPr>
           <a:xfrm>
-            <a:off x="8468179" y="4611852"/>
-            <a:ext cx="2888668" cy="529717"/>
+            <a:off x="8473133" y="4611852"/>
+            <a:ext cx="2883714" cy="529717"/>
           </a:xfrm>
           <a:prstGeom prst="rect">
             <a:avLst/>
@@ -58109,7 +58109,7 @@
         <p:spPr>
           <a:xfrm>
             <a:off x="685800" y="1181303"/>
-            <a:ext cx="2555243" cy="282067"/>
+            <a:ext cx="2541417" cy="282067"/>
           </a:xfrm>
           <a:prstGeom prst="rect">
             <a:avLst/>
@@ -58150,8 +58150,8 @@
         </p:nvSpPr>
         <p:spPr>
           <a:xfrm>
-            <a:off x="3387347" y="1181303"/>
-            <a:ext cx="664134" cy="282067"/>
+            <a:off x="3373521" y="1181303"/>
+            <a:ext cx="707344" cy="282067"/>
           </a:xfrm>
           <a:prstGeom prst="rect">
             <a:avLst/>
@@ -58192,8 +58192,8 @@
         </p:nvSpPr>
         <p:spPr>
           <a:xfrm>
-            <a:off x="4197785" y="1181303"/>
-            <a:ext cx="7159062" cy="282067"/>
+            <a:off x="4227169" y="1181303"/>
+            <a:ext cx="7129678" cy="282067"/>
           </a:xfrm>
           <a:prstGeom prst="rect">
             <a:avLst/>
@@ -58235,7 +58235,7 @@
         <p:spPr>
           <a:xfrm>
             <a:off x="685800" y="1463370"/>
-            <a:ext cx="2555243" cy="529717"/>
+            <a:ext cx="2541417" cy="529717"/>
           </a:xfrm>
           <a:prstGeom prst="rect">
             <a:avLst/>
@@ -58276,8 +58276,8 @@
         </p:nvSpPr>
         <p:spPr>
           <a:xfrm>
-            <a:off x="3387347" y="1463370"/>
-            <a:ext cx="664134" cy="529717"/>
+            <a:off x="3373521" y="1463370"/>
+            <a:ext cx="707344" cy="529717"/>
           </a:xfrm>
           <a:prstGeom prst="rect">
             <a:avLst/>
@@ -58318,8 +58318,8 @@
         </p:nvSpPr>
         <p:spPr>
           <a:xfrm>
-            <a:off x="4197785" y="1463370"/>
-            <a:ext cx="7159062" cy="529717"/>
+            <a:off x="4227169" y="1463370"/>
+            <a:ext cx="7129678" cy="529717"/>
           </a:xfrm>
           <a:prstGeom prst="rect">
             <a:avLst/>
@@ -58459,7 +58459,7 @@
         <p:spPr>
           <a:xfrm>
             <a:off x="685800" y="1993087"/>
-            <a:ext cx="2555243" cy="529717"/>
+            <a:ext cx="2541417" cy="529717"/>
           </a:xfrm>
           <a:prstGeom prst="rect">
             <a:avLst/>
@@ -58500,8 +58500,8 @@
         </p:nvSpPr>
         <p:spPr>
           <a:xfrm>
-            <a:off x="3387347" y="1993087"/>
-            <a:ext cx="664134" cy="529717"/>
+            <a:off x="3373521" y="1993087"/>
+            <a:ext cx="707344" cy="529717"/>
           </a:xfrm>
           <a:prstGeom prst="rect">
             <a:avLst/>
@@ -58542,8 +58542,8 @@
         </p:nvSpPr>
         <p:spPr>
           <a:xfrm>
-            <a:off x="4197785" y="1993087"/>
-            <a:ext cx="7159062" cy="529717"/>
+            <a:off x="4227169" y="1993087"/>
+            <a:ext cx="7129678" cy="529717"/>
           </a:xfrm>
           <a:prstGeom prst="rect">
             <a:avLst/>
@@ -58620,7 +58620,7 @@
         <p:spPr>
           <a:xfrm>
             <a:off x="685800" y="2522804"/>
-            <a:ext cx="2555243" cy="529717"/>
+            <a:ext cx="2541417" cy="529717"/>
           </a:xfrm>
           <a:prstGeom prst="rect">
             <a:avLst/>
@@ -58661,8 +58661,8 @@
         </p:nvSpPr>
         <p:spPr>
           <a:xfrm>
-            <a:off x="3387347" y="2522804"/>
-            <a:ext cx="664134" cy="529717"/>
+            <a:off x="3373521" y="2522804"/>
+            <a:ext cx="707344" cy="529717"/>
           </a:xfrm>
           <a:prstGeom prst="rect">
             <a:avLst/>
@@ -58703,8 +58703,8 @@
         </p:nvSpPr>
         <p:spPr>
           <a:xfrm>
-            <a:off x="4197785" y="2522804"/>
-            <a:ext cx="7159062" cy="529717"/>
+            <a:off x="4227169" y="2522804"/>
+            <a:ext cx="7129678" cy="529717"/>
           </a:xfrm>
           <a:prstGeom prst="rect">
             <a:avLst/>
@@ -58781,7 +58781,7 @@
         <p:spPr>
           <a:xfrm>
             <a:off x="685800" y="3052521"/>
-            <a:ext cx="2555243" cy="529717"/>
+            <a:ext cx="2541417" cy="529717"/>
           </a:xfrm>
           <a:prstGeom prst="rect">
             <a:avLst/>
@@ -58822,8 +58822,8 @@
         </p:nvSpPr>
         <p:spPr>
           <a:xfrm>
-            <a:off x="3387347" y="3052521"/>
-            <a:ext cx="664134" cy="529717"/>
+            <a:off x="3373521" y="3052521"/>
+            <a:ext cx="707344" cy="529717"/>
           </a:xfrm>
           <a:prstGeom prst="rect">
             <a:avLst/>
@@ -58864,8 +58864,8 @@
         </p:nvSpPr>
         <p:spPr>
           <a:xfrm>
-            <a:off x="4197785" y="3052521"/>
-            <a:ext cx="7159062" cy="529717"/>
+            <a:off x="4227169" y="3052521"/>
+            <a:ext cx="7129678" cy="529717"/>
           </a:xfrm>
           <a:prstGeom prst="rect">
             <a:avLst/>
@@ -58942,7 +58942,7 @@
         <p:spPr>
           <a:xfrm>
             <a:off x="685800" y="3582238"/>
-            <a:ext cx="2555243" cy="529717"/>
+            <a:ext cx="2541417" cy="529717"/>
           </a:xfrm>
           <a:prstGeom prst="rect">
             <a:avLst/>
@@ -58983,8 +58983,8 @@
         </p:nvSpPr>
         <p:spPr>
           <a:xfrm>
-            <a:off x="3387347" y="3582238"/>
-            <a:ext cx="664134" cy="529717"/>
+            <a:off x="3373521" y="3582238"/>
+            <a:ext cx="707344" cy="529717"/>
           </a:xfrm>
           <a:prstGeom prst="rect">
             <a:avLst/>
@@ -59025,8 +59025,8 @@
         </p:nvSpPr>
         <p:spPr>
           <a:xfrm>
-            <a:off x="4197785" y="3582238"/>
-            <a:ext cx="7159062" cy="529717"/>
+            <a:off x="4227169" y="3582238"/>
+            <a:ext cx="7129678" cy="529717"/>
           </a:xfrm>
           <a:prstGeom prst="rect">
             <a:avLst/>
@@ -60056,7 +60056,7 @@
       </p:sp>
       <p:pic>
         <p:nvPicPr>
-          <p:cNvPr id="3" name="Picture 2" descr="mcp-n08-gde-chto-stoit.png"/>
+          <p:cNvPr id="3" name="Picture 2" descr="mcp-n08-gde-chto-stoit-en.png"/>
           <p:cNvPicPr>
             <a:picLocks noChangeAspect="1"/>
           </p:cNvPicPr>
@@ -60190,7 +60190,7 @@
       </p:sp>
       <p:pic>
         <p:nvPicPr>
-          <p:cNvPr id="3" name="Picture 2" descr="mcp-n09-mehanizm.png"/>
+          <p:cNvPr id="3" name="Picture 2" descr="mcp-n09-mehanizm-en.png"/>
           <p:cNvPicPr>
             <a:picLocks noChangeAspect="1"/>
           </p:cNvPicPr>
